--- a/documents/Template - Fase 2 - Apresentação Executiva - Projeto em Business Intelligence e Analytics.pptx
+++ b/documents/Template - Fase 2 - Apresentação Executiva - Projeto em Business Intelligence e Analytics.pptx
@@ -5,13 +5,21 @@
     <p:sldMasterId id="2147483665" r:id="rId4"/>
   </p:sldMasterIdLst>
   <p:handoutMasterIdLst>
-    <p:handoutMasterId r:id="rId9"/>
+    <p:handoutMasterId r:id="rId17"/>
   </p:handoutMasterIdLst>
   <p:sldIdLst>
     <p:sldId id="288" r:id="rId5"/>
-    <p:sldId id="303" r:id="rId6"/>
-    <p:sldId id="302" r:id="rId7"/>
-    <p:sldId id="300" r:id="rId8"/>
+    <p:sldId id="302" r:id="rId6"/>
+    <p:sldId id="305" r:id="rId7"/>
+    <p:sldId id="304" r:id="rId8"/>
+    <p:sldId id="306" r:id="rId9"/>
+    <p:sldId id="312" r:id="rId10"/>
+    <p:sldId id="303" r:id="rId11"/>
+    <p:sldId id="310" r:id="rId12"/>
+    <p:sldId id="307" r:id="rId13"/>
+    <p:sldId id="309" r:id="rId14"/>
+    <p:sldId id="313" r:id="rId15"/>
+    <p:sldId id="300" r:id="rId16"/>
   </p:sldIdLst>
   <p:sldSz cx="16402050" cy="9601200"/>
   <p:notesSz cx="6858000" cy="9144000"/>
@@ -116,8 +124,16 @@
         <p14:section name="Seção Padrão" id="{DB409441-E25A-462F-9A2D-B5D2AB63FBF8}">
           <p14:sldIdLst>
             <p14:sldId id="288"/>
+            <p14:sldId id="302"/>
+            <p14:sldId id="305"/>
+            <p14:sldId id="304"/>
+            <p14:sldId id="306"/>
+            <p14:sldId id="312"/>
             <p14:sldId id="303"/>
-            <p14:sldId id="302"/>
+            <p14:sldId id="310"/>
+            <p14:sldId id="307"/>
+            <p14:sldId id="309"/>
+            <p14:sldId id="313"/>
             <p14:sldId id="300"/>
           </p14:sldIdLst>
         </p14:section>
@@ -131,1129 +147,6 @@
     </p:ext>
   </p:extLst>
 </p:presentation>
-</file>
-
-<file path=ppt/changesInfos/changesInfo1.xml><?xml version="1.0" encoding="utf-8"?>
-<pc:chgInfo xmlns:a="http://schemas.openxmlformats.org/drawingml/2006/main" xmlns:r="http://schemas.openxmlformats.org/officeDocument/2006/relationships" xmlns:ac="http://schemas.microsoft.com/office/drawing/2013/main/command" xmlns:pc="http://schemas.microsoft.com/office/powerpoint/2013/main/command">
-  <pc:docChgLst>
-    <pc:chgData name="Rafaela Boletti Duraes Souto" userId="78f52f2a-2d51-4833-a638-c8c75f30638a" providerId="ADAL" clId="{03D0FF63-8FEF-49B8-A9DA-C9A2B3956324}"/>
-    <pc:docChg chg="undo modMainMaster">
-      <pc:chgData name="Rafaela Boletti Duraes Souto" userId="78f52f2a-2d51-4833-a638-c8c75f30638a" providerId="ADAL" clId="{03D0FF63-8FEF-49B8-A9DA-C9A2B3956324}" dt="2025-05-08T12:30:49.267" v="133" actId="12788"/>
-      <pc:docMkLst>
-        <pc:docMk/>
-      </pc:docMkLst>
-      <pc:sldMasterChg chg="modSldLayout">
-        <pc:chgData name="Rafaela Boletti Duraes Souto" userId="78f52f2a-2d51-4833-a638-c8c75f30638a" providerId="ADAL" clId="{03D0FF63-8FEF-49B8-A9DA-C9A2B3956324}" dt="2025-05-08T12:30:49.267" v="133" actId="12788"/>
-        <pc:sldMasterMkLst>
-          <pc:docMk/>
-          <pc:sldMasterMk cId="1747979782" sldId="2147483665"/>
-        </pc:sldMasterMkLst>
-        <pc:sldLayoutChg chg="addSp delSp modSp">
-          <pc:chgData name="Rafaela Boletti Duraes Souto" userId="78f52f2a-2d51-4833-a638-c8c75f30638a" providerId="ADAL" clId="{03D0FF63-8FEF-49B8-A9DA-C9A2B3956324}" dt="2025-05-08T12:30:49.267" v="133" actId="12788"/>
-          <pc:sldLayoutMkLst>
-            <pc:docMk/>
-            <pc:sldMasterMk cId="1747979782" sldId="2147483665"/>
-            <pc:sldLayoutMk cId="959556121" sldId="2147483707"/>
-          </pc:sldLayoutMkLst>
-          <pc:spChg chg="add del mod">
-            <ac:chgData name="Rafaela Boletti Duraes Souto" userId="78f52f2a-2d51-4833-a638-c8c75f30638a" providerId="ADAL" clId="{03D0FF63-8FEF-49B8-A9DA-C9A2B3956324}" dt="2025-05-08T12:30:49.267" v="133" actId="12788"/>
-            <ac:spMkLst>
-              <pc:docMk/>
-              <pc:sldMasterMk cId="1747979782" sldId="2147483665"/>
-              <pc:sldLayoutMk cId="959556121" sldId="2147483707"/>
-              <ac:spMk id="14" creationId="{4B73456F-61AF-4547-97EF-7A33FBA993AC}"/>
-            </ac:spMkLst>
-          </pc:spChg>
-        </pc:sldLayoutChg>
-      </pc:sldMasterChg>
-    </pc:docChg>
-  </pc:docChgLst>
-  <pc:docChgLst>
-    <pc:chgData name="Rafaela Boletti Duraes Souto" userId="78f52f2a-2d51-4833-a638-c8c75f30638a" providerId="ADAL" clId="{3072E378-0BC3-46EF-92A3-96EEAF7BEDB3}"/>
-    <pc:docChg chg="undo custSel modMainMaster">
-      <pc:chgData name="Rafaela Boletti Duraes Souto" userId="78f52f2a-2d51-4833-a638-c8c75f30638a" providerId="ADAL" clId="{3072E378-0BC3-46EF-92A3-96EEAF7BEDB3}" dt="2025-03-31T19:38:58.148" v="167" actId="1035"/>
-      <pc:docMkLst>
-        <pc:docMk/>
-      </pc:docMkLst>
-      <pc:sldMasterChg chg="modSldLayout">
-        <pc:chgData name="Rafaela Boletti Duraes Souto" userId="78f52f2a-2d51-4833-a638-c8c75f30638a" providerId="ADAL" clId="{3072E378-0BC3-46EF-92A3-96EEAF7BEDB3}" dt="2025-03-31T19:38:58.148" v="167" actId="1035"/>
-        <pc:sldMasterMkLst>
-          <pc:docMk/>
-          <pc:sldMasterMk cId="1747979782" sldId="2147483665"/>
-        </pc:sldMasterMkLst>
-        <pc:sldLayoutChg chg="addSp delSp modSp">
-          <pc:chgData name="Rafaela Boletti Duraes Souto" userId="78f52f2a-2d51-4833-a638-c8c75f30638a" providerId="ADAL" clId="{3072E378-0BC3-46EF-92A3-96EEAF7BEDB3}" dt="2025-03-31T19:37:52.174" v="141" actId="1076"/>
-          <pc:sldLayoutMkLst>
-            <pc:docMk/>
-            <pc:sldMasterMk cId="1747979782" sldId="2147483665"/>
-            <pc:sldLayoutMk cId="1417832495" sldId="2147483696"/>
-          </pc:sldLayoutMkLst>
-          <pc:spChg chg="mod">
-            <ac:chgData name="Rafaela Boletti Duraes Souto" userId="78f52f2a-2d51-4833-a638-c8c75f30638a" providerId="ADAL" clId="{3072E378-0BC3-46EF-92A3-96EEAF7BEDB3}" dt="2025-03-31T19:37:52.174" v="141" actId="1076"/>
-            <ac:spMkLst>
-              <pc:docMk/>
-              <pc:sldMasterMk cId="1747979782" sldId="2147483665"/>
-              <pc:sldLayoutMk cId="1417832495" sldId="2147483696"/>
-              <ac:spMk id="9" creationId="{FA034C09-59DD-4564-9C6E-8F60F069EB37}"/>
-            </ac:spMkLst>
-          </pc:spChg>
-          <pc:spChg chg="add ord">
-            <ac:chgData name="Rafaela Boletti Duraes Souto" userId="78f52f2a-2d51-4833-a638-c8c75f30638a" providerId="ADAL" clId="{3072E378-0BC3-46EF-92A3-96EEAF7BEDB3}" dt="2025-03-31T19:22:26.178" v="14" actId="167"/>
-            <ac:spMkLst>
-              <pc:docMk/>
-              <pc:sldMasterMk cId="1747979782" sldId="2147483665"/>
-              <pc:sldLayoutMk cId="1417832495" sldId="2147483696"/>
-              <ac:spMk id="13" creationId="{5E837148-19BD-4164-965C-6A241D06D853}"/>
-            </ac:spMkLst>
-          </pc:spChg>
-          <pc:spChg chg="add mod">
-            <ac:chgData name="Rafaela Boletti Duraes Souto" userId="78f52f2a-2d51-4833-a638-c8c75f30638a" providerId="ADAL" clId="{3072E378-0BC3-46EF-92A3-96EEAF7BEDB3}" dt="2025-03-31T19:29:02.544" v="22" actId="207"/>
-            <ac:spMkLst>
-              <pc:docMk/>
-              <pc:sldMasterMk cId="1747979782" sldId="2147483665"/>
-              <pc:sldLayoutMk cId="1417832495" sldId="2147483696"/>
-              <ac:spMk id="17" creationId="{973AD855-C71D-41C0-8F1D-FEFA9D3A9581}"/>
-            </ac:spMkLst>
-          </pc:spChg>
-          <pc:spChg chg="add del mod">
-            <ac:chgData name="Rafaela Boletti Duraes Souto" userId="78f52f2a-2d51-4833-a638-c8c75f30638a" providerId="ADAL" clId="{3072E378-0BC3-46EF-92A3-96EEAF7BEDB3}" dt="2025-03-31T19:29:04.448" v="23" actId="478"/>
-            <ac:spMkLst>
-              <pc:docMk/>
-              <pc:sldMasterMk cId="1747979782" sldId="2147483665"/>
-              <pc:sldLayoutMk cId="1417832495" sldId="2147483696"/>
-              <ac:spMk id="18" creationId="{F0B19AFE-B6F1-4483-960C-15E5E88B392A}"/>
-            </ac:spMkLst>
-          </pc:spChg>
-          <pc:spChg chg="add">
-            <ac:chgData name="Rafaela Boletti Duraes Souto" userId="78f52f2a-2d51-4833-a638-c8c75f30638a" providerId="ADAL" clId="{3072E378-0BC3-46EF-92A3-96EEAF7BEDB3}" dt="2025-03-31T19:37:48.562" v="140"/>
-            <ac:spMkLst>
-              <pc:docMk/>
-              <pc:sldMasterMk cId="1747979782" sldId="2147483665"/>
-              <pc:sldLayoutMk cId="1417832495" sldId="2147483696"/>
-              <ac:spMk id="19" creationId="{1353A036-17D9-4E9E-9704-A08842166D53}"/>
-            </ac:spMkLst>
-          </pc:spChg>
-          <pc:spChg chg="del">
-            <ac:chgData name="Rafaela Boletti Duraes Souto" userId="78f52f2a-2d51-4833-a638-c8c75f30638a" providerId="ADAL" clId="{3072E378-0BC3-46EF-92A3-96EEAF7BEDB3}" dt="2025-03-31T19:28:43.308" v="19" actId="478"/>
-            <ac:spMkLst>
-              <pc:docMk/>
-              <pc:sldMasterMk cId="1747979782" sldId="2147483665"/>
-              <pc:sldLayoutMk cId="1417832495" sldId="2147483696"/>
-              <ac:spMk id="20" creationId="{116CAF9D-886C-40BC-A8C2-77F02A323D85}"/>
-            </ac:spMkLst>
-          </pc:spChg>
-          <pc:grpChg chg="del">
-            <ac:chgData name="Rafaela Boletti Duraes Souto" userId="78f52f2a-2d51-4833-a638-c8c75f30638a" providerId="ADAL" clId="{3072E378-0BC3-46EF-92A3-96EEAF7BEDB3}" dt="2025-03-31T19:37:48.168" v="139" actId="478"/>
-            <ac:grpSpMkLst>
-              <pc:docMk/>
-              <pc:sldMasterMk cId="1747979782" sldId="2147483665"/>
-              <pc:sldLayoutMk cId="1417832495" sldId="2147483696"/>
-              <ac:grpSpMk id="10" creationId="{86C6CB5B-AE2B-4093-8335-D3DCCA9390B2}"/>
-            </ac:grpSpMkLst>
-          </pc:grpChg>
-          <pc:grpChg chg="del">
-            <ac:chgData name="Rafaela Boletti Duraes Souto" userId="78f52f2a-2d51-4833-a638-c8c75f30638a" providerId="ADAL" clId="{3072E378-0BC3-46EF-92A3-96EEAF7BEDB3}" dt="2025-03-31T19:28:28.897" v="16" actId="478"/>
-            <ac:grpSpMkLst>
-              <pc:docMk/>
-              <pc:sldMasterMk cId="1747979782" sldId="2147483665"/>
-              <pc:sldLayoutMk cId="1417832495" sldId="2147483696"/>
-              <ac:grpSpMk id="14" creationId="{B70FB7A2-C821-4005-9581-A434F16907DD}"/>
-            </ac:grpSpMkLst>
-          </pc:grpChg>
-          <pc:picChg chg="add">
-            <ac:chgData name="Rafaela Boletti Duraes Souto" userId="78f52f2a-2d51-4833-a638-c8c75f30638a" providerId="ADAL" clId="{3072E378-0BC3-46EF-92A3-96EEAF7BEDB3}" dt="2025-03-31T19:37:48.562" v="140"/>
-            <ac:picMkLst>
-              <pc:docMk/>
-              <pc:sldMasterMk cId="1747979782" sldId="2147483665"/>
-              <pc:sldLayoutMk cId="1417832495" sldId="2147483696"/>
-              <ac:picMk id="21" creationId="{BB788BAF-7DDB-4210-A352-F3FA18110B7E}"/>
-            </ac:picMkLst>
-          </pc:picChg>
-        </pc:sldLayoutChg>
-        <pc:sldLayoutChg chg="addSp delSp modSp">
-          <pc:chgData name="Rafaela Boletti Duraes Souto" userId="78f52f2a-2d51-4833-a638-c8c75f30638a" providerId="ADAL" clId="{3072E378-0BC3-46EF-92A3-96EEAF7BEDB3}" dt="2025-03-31T19:38:01.289" v="148" actId="1036"/>
-          <pc:sldLayoutMkLst>
-            <pc:docMk/>
-            <pc:sldMasterMk cId="1747979782" sldId="2147483665"/>
-            <pc:sldLayoutMk cId="3455226965" sldId="2147483703"/>
-          </pc:sldLayoutMkLst>
-          <pc:spChg chg="del">
-            <ac:chgData name="Rafaela Boletti Duraes Souto" userId="78f52f2a-2d51-4833-a638-c8c75f30638a" providerId="ADAL" clId="{3072E378-0BC3-46EF-92A3-96EEAF7BEDB3}" dt="2025-03-31T19:33:12.212" v="73" actId="478"/>
-            <ac:spMkLst>
-              <pc:docMk/>
-              <pc:sldMasterMk cId="1747979782" sldId="2147483665"/>
-              <pc:sldLayoutMk cId="3455226965" sldId="2147483703"/>
-              <ac:spMk id="10" creationId="{BB5C9B73-6D52-4F37-94E6-944F3BB56E05}"/>
-            </ac:spMkLst>
-          </pc:spChg>
-          <pc:spChg chg="add ord">
-            <ac:chgData name="Rafaela Boletti Duraes Souto" userId="78f52f2a-2d51-4833-a638-c8c75f30638a" providerId="ADAL" clId="{3072E378-0BC3-46EF-92A3-96EEAF7BEDB3}" dt="2025-03-31T19:33:15.271" v="75" actId="167"/>
-            <ac:spMkLst>
-              <pc:docMk/>
-              <pc:sldMasterMk cId="1747979782" sldId="2147483665"/>
-              <pc:sldLayoutMk cId="3455226965" sldId="2147483703"/>
-              <ac:spMk id="11" creationId="{85AC51AE-23D2-45C2-A6C4-33D754A70E7D}"/>
-            </ac:spMkLst>
-          </pc:spChg>
-          <pc:spChg chg="add ord">
-            <ac:chgData name="Rafaela Boletti Duraes Souto" userId="78f52f2a-2d51-4833-a638-c8c75f30638a" providerId="ADAL" clId="{3072E378-0BC3-46EF-92A3-96EEAF7BEDB3}" dt="2025-03-31T19:33:15.271" v="75" actId="167"/>
-            <ac:spMkLst>
-              <pc:docMk/>
-              <pc:sldMasterMk cId="1747979782" sldId="2147483665"/>
-              <pc:sldLayoutMk cId="3455226965" sldId="2147483703"/>
-              <ac:spMk id="12" creationId="{98C28BEA-010B-40D0-87FA-AA14F0BD4605}"/>
-            </ac:spMkLst>
-          </pc:spChg>
-          <pc:spChg chg="add">
-            <ac:chgData name="Rafaela Boletti Duraes Souto" userId="78f52f2a-2d51-4833-a638-c8c75f30638a" providerId="ADAL" clId="{3072E378-0BC3-46EF-92A3-96EEAF7BEDB3}" dt="2025-03-31T19:37:37.568" v="138"/>
-            <ac:spMkLst>
-              <pc:docMk/>
-              <pc:sldMasterMk cId="1747979782" sldId="2147483665"/>
-              <pc:sldLayoutMk cId="3455226965" sldId="2147483703"/>
-              <ac:spMk id="13" creationId="{3217B83B-D21F-4662-BB75-5413B2BF7977}"/>
-            </ac:spMkLst>
-          </pc:spChg>
-          <pc:spChg chg="mod">
-            <ac:chgData name="Rafaela Boletti Duraes Souto" userId="78f52f2a-2d51-4833-a638-c8c75f30638a" providerId="ADAL" clId="{3072E378-0BC3-46EF-92A3-96EEAF7BEDB3}" dt="2025-03-31T19:38:01.289" v="148" actId="1036"/>
-            <ac:spMkLst>
-              <pc:docMk/>
-              <pc:sldMasterMk cId="1747979782" sldId="2147483665"/>
-              <pc:sldLayoutMk cId="3455226965" sldId="2147483703"/>
-              <ac:spMk id="18" creationId="{97B09D44-09F1-42EB-9D42-609A3774D191}"/>
-            </ac:spMkLst>
-          </pc:spChg>
-          <pc:grpChg chg="del">
-            <ac:chgData name="Rafaela Boletti Duraes Souto" userId="78f52f2a-2d51-4833-a638-c8c75f30638a" providerId="ADAL" clId="{3072E378-0BC3-46EF-92A3-96EEAF7BEDB3}" dt="2025-03-31T19:37:37.268" v="137" actId="478"/>
-            <ac:grpSpMkLst>
-              <pc:docMk/>
-              <pc:sldMasterMk cId="1747979782" sldId="2147483665"/>
-              <pc:sldLayoutMk cId="3455226965" sldId="2147483703"/>
-              <ac:grpSpMk id="20" creationId="{C069DABA-CA51-481C-87E8-9591818EEB9F}"/>
-            </ac:grpSpMkLst>
-          </pc:grpChg>
-          <pc:grpChg chg="del">
-            <ac:chgData name="Rafaela Boletti Duraes Souto" userId="78f52f2a-2d51-4833-a638-c8c75f30638a" providerId="ADAL" clId="{3072E378-0BC3-46EF-92A3-96EEAF7BEDB3}" dt="2025-03-31T19:33:12.212" v="73" actId="478"/>
-            <ac:grpSpMkLst>
-              <pc:docMk/>
-              <pc:sldMasterMk cId="1747979782" sldId="2147483665"/>
-              <pc:sldLayoutMk cId="3455226965" sldId="2147483703"/>
-              <ac:grpSpMk id="23" creationId="{D9D9683D-F94C-48E5-9F09-2F6C1BAB97EA}"/>
-            </ac:grpSpMkLst>
-          </pc:grpChg>
-          <pc:picChg chg="add">
-            <ac:chgData name="Rafaela Boletti Duraes Souto" userId="78f52f2a-2d51-4833-a638-c8c75f30638a" providerId="ADAL" clId="{3072E378-0BC3-46EF-92A3-96EEAF7BEDB3}" dt="2025-03-31T19:37:37.568" v="138"/>
-            <ac:picMkLst>
-              <pc:docMk/>
-              <pc:sldMasterMk cId="1747979782" sldId="2147483665"/>
-              <pc:sldLayoutMk cId="3455226965" sldId="2147483703"/>
-              <ac:picMk id="14" creationId="{4354F9AB-FA02-40BC-94B0-478F68FD159A}"/>
-            </ac:picMkLst>
-          </pc:picChg>
-        </pc:sldLayoutChg>
-        <pc:sldLayoutChg chg="addSp delSp modSp">
-          <pc:chgData name="Rafaela Boletti Duraes Souto" userId="78f52f2a-2d51-4833-a638-c8c75f30638a" providerId="ADAL" clId="{3072E378-0BC3-46EF-92A3-96EEAF7BEDB3}" dt="2025-03-31T19:38:26.636" v="154"/>
-          <pc:sldLayoutMkLst>
-            <pc:docMk/>
-            <pc:sldMasterMk cId="1747979782" sldId="2147483665"/>
-            <pc:sldLayoutMk cId="1258947625" sldId="2147483705"/>
-          </pc:sldLayoutMkLst>
-          <pc:spChg chg="mod">
-            <ac:chgData name="Rafaela Boletti Duraes Souto" userId="78f52f2a-2d51-4833-a638-c8c75f30638a" providerId="ADAL" clId="{3072E378-0BC3-46EF-92A3-96EEAF7BEDB3}" dt="2025-03-31T19:33:32.066" v="79" actId="207"/>
-            <ac:spMkLst>
-              <pc:docMk/>
-              <pc:sldMasterMk cId="1747979782" sldId="2147483665"/>
-              <pc:sldLayoutMk cId="1258947625" sldId="2147483705"/>
-              <ac:spMk id="9" creationId="{FA034C09-59DD-4564-9C6E-8F60F069EB37}"/>
-            </ac:spMkLst>
-          </pc:spChg>
-          <pc:spChg chg="del">
-            <ac:chgData name="Rafaela Boletti Duraes Souto" userId="78f52f2a-2d51-4833-a638-c8c75f30638a" providerId="ADAL" clId="{3072E378-0BC3-46EF-92A3-96EEAF7BEDB3}" dt="2025-03-31T19:30:11.655" v="37" actId="478"/>
-            <ac:spMkLst>
-              <pc:docMk/>
-              <pc:sldMasterMk cId="1747979782" sldId="2147483665"/>
-              <pc:sldLayoutMk cId="1258947625" sldId="2147483705"/>
-              <ac:spMk id="13" creationId="{CE157B05-BE37-42FC-9921-5734532276FD}"/>
-            </ac:spMkLst>
-          </pc:spChg>
-          <pc:spChg chg="add ord">
-            <ac:chgData name="Rafaela Boletti Duraes Souto" userId="78f52f2a-2d51-4833-a638-c8c75f30638a" providerId="ADAL" clId="{3072E378-0BC3-46EF-92A3-96EEAF7BEDB3}" dt="2025-03-31T19:30:13.691" v="39" actId="167"/>
-            <ac:spMkLst>
-              <pc:docMk/>
-              <pc:sldMasterMk cId="1747979782" sldId="2147483665"/>
-              <pc:sldLayoutMk cId="1258947625" sldId="2147483705"/>
-              <ac:spMk id="17" creationId="{660A6460-B176-49E9-83E6-4236135CEBE4}"/>
-            </ac:spMkLst>
-          </pc:spChg>
-          <pc:spChg chg="add ord">
-            <ac:chgData name="Rafaela Boletti Duraes Souto" userId="78f52f2a-2d51-4833-a638-c8c75f30638a" providerId="ADAL" clId="{3072E378-0BC3-46EF-92A3-96EEAF7BEDB3}" dt="2025-03-31T19:30:13.691" v="39" actId="167"/>
-            <ac:spMkLst>
-              <pc:docMk/>
-              <pc:sldMasterMk cId="1747979782" sldId="2147483665"/>
-              <pc:sldLayoutMk cId="1258947625" sldId="2147483705"/>
-              <ac:spMk id="18" creationId="{CCDF1FBA-ED05-4FB0-AB4F-E01F2CBA5534}"/>
-            </ac:spMkLst>
-          </pc:spChg>
-          <pc:spChg chg="add">
-            <ac:chgData name="Rafaela Boletti Duraes Souto" userId="78f52f2a-2d51-4833-a638-c8c75f30638a" providerId="ADAL" clId="{3072E378-0BC3-46EF-92A3-96EEAF7BEDB3}" dt="2025-03-31T19:38:26.636" v="154"/>
-            <ac:spMkLst>
-              <pc:docMk/>
-              <pc:sldMasterMk cId="1747979782" sldId="2147483665"/>
-              <pc:sldLayoutMk cId="1258947625" sldId="2147483705"/>
-              <ac:spMk id="19" creationId="{5594E56C-E820-46B8-ACC1-F2BF69928467}"/>
-            </ac:spMkLst>
-          </pc:spChg>
-          <pc:grpChg chg="del">
-            <ac:chgData name="Rafaela Boletti Duraes Souto" userId="78f52f2a-2d51-4833-a638-c8c75f30638a" providerId="ADAL" clId="{3072E378-0BC3-46EF-92A3-96EEAF7BEDB3}" dt="2025-03-31T19:38:23.029" v="153" actId="478"/>
-            <ac:grpSpMkLst>
-              <pc:docMk/>
-              <pc:sldMasterMk cId="1747979782" sldId="2147483665"/>
-              <pc:sldLayoutMk cId="1258947625" sldId="2147483705"/>
-              <ac:grpSpMk id="10" creationId="{86C6CB5B-AE2B-4093-8335-D3DCCA9390B2}"/>
-            </ac:grpSpMkLst>
-          </pc:grpChg>
-          <pc:grpChg chg="del">
-            <ac:chgData name="Rafaela Boletti Duraes Souto" userId="78f52f2a-2d51-4833-a638-c8c75f30638a" providerId="ADAL" clId="{3072E378-0BC3-46EF-92A3-96EEAF7BEDB3}" dt="2025-03-31T19:30:11.655" v="37" actId="478"/>
-            <ac:grpSpMkLst>
-              <pc:docMk/>
-              <pc:sldMasterMk cId="1747979782" sldId="2147483665"/>
-              <pc:sldLayoutMk cId="1258947625" sldId="2147483705"/>
-              <ac:grpSpMk id="14" creationId="{334B37F2-BC37-40E8-A4B0-6336FA1DF1AD}"/>
-            </ac:grpSpMkLst>
-          </pc:grpChg>
-          <pc:picChg chg="add">
-            <ac:chgData name="Rafaela Boletti Duraes Souto" userId="78f52f2a-2d51-4833-a638-c8c75f30638a" providerId="ADAL" clId="{3072E378-0BC3-46EF-92A3-96EEAF7BEDB3}" dt="2025-03-31T19:38:26.636" v="154"/>
-            <ac:picMkLst>
-              <pc:docMk/>
-              <pc:sldMasterMk cId="1747979782" sldId="2147483665"/>
-              <pc:sldLayoutMk cId="1258947625" sldId="2147483705"/>
-              <ac:picMk id="20" creationId="{D806F0BB-2733-4143-A878-068CBB914D83}"/>
-            </ac:picMkLst>
-          </pc:picChg>
-        </pc:sldLayoutChg>
-        <pc:sldLayoutChg chg="addSp delSp modSp">
-          <pc:chgData name="Rafaela Boletti Duraes Souto" userId="78f52f2a-2d51-4833-a638-c8c75f30638a" providerId="ADAL" clId="{3072E378-0BC3-46EF-92A3-96EEAF7BEDB3}" dt="2025-03-31T19:38:06.233" v="150" actId="1035"/>
-          <pc:sldLayoutMkLst>
-            <pc:docMk/>
-            <pc:sldMasterMk cId="1747979782" sldId="2147483665"/>
-            <pc:sldLayoutMk cId="55212957" sldId="2147483707"/>
-          </pc:sldLayoutMkLst>
-          <pc:spChg chg="add ord">
-            <ac:chgData name="Rafaela Boletti Duraes Souto" userId="78f52f2a-2d51-4833-a638-c8c75f30638a" providerId="ADAL" clId="{3072E378-0BC3-46EF-92A3-96EEAF7BEDB3}" dt="2025-03-31T19:29:33.715" v="26" actId="167"/>
-            <ac:spMkLst>
-              <pc:docMk/>
-              <pc:sldMasterMk cId="1747979782" sldId="2147483665"/>
-              <pc:sldLayoutMk cId="55212957" sldId="2147483707"/>
-              <ac:spMk id="11" creationId="{31365953-D351-44C7-9765-C07CF36B6C52}"/>
-            </ac:spMkLst>
-          </pc:spChg>
-          <pc:spChg chg="add ord">
-            <ac:chgData name="Rafaela Boletti Duraes Souto" userId="78f52f2a-2d51-4833-a638-c8c75f30638a" providerId="ADAL" clId="{3072E378-0BC3-46EF-92A3-96EEAF7BEDB3}" dt="2025-03-31T19:29:33.715" v="26" actId="167"/>
-            <ac:spMkLst>
-              <pc:docMk/>
-              <pc:sldMasterMk cId="1747979782" sldId="2147483665"/>
-              <pc:sldLayoutMk cId="55212957" sldId="2147483707"/>
-              <ac:spMk id="12" creationId="{3BD0C867-911A-48B1-AFB1-AB125D368928}"/>
-            </ac:spMkLst>
-          </pc:spChg>
-          <pc:spChg chg="mod">
-            <ac:chgData name="Rafaela Boletti Duraes Souto" userId="78f52f2a-2d51-4833-a638-c8c75f30638a" providerId="ADAL" clId="{3072E378-0BC3-46EF-92A3-96EEAF7BEDB3}" dt="2025-03-31T19:38:06.233" v="150" actId="1035"/>
-            <ac:spMkLst>
-              <pc:docMk/>
-              <pc:sldMasterMk cId="1747979782" sldId="2147483665"/>
-              <pc:sldLayoutMk cId="55212957" sldId="2147483707"/>
-              <ac:spMk id="19" creationId="{ADA911F7-F870-4379-9B09-DFDDF9DDD2F1}"/>
-            </ac:spMkLst>
-          </pc:spChg>
-          <pc:spChg chg="mod topLvl">
-            <ac:chgData name="Rafaela Boletti Duraes Souto" userId="78f52f2a-2d51-4833-a638-c8c75f30638a" providerId="ADAL" clId="{3072E378-0BC3-46EF-92A3-96EEAF7BEDB3}" dt="2025-03-31T19:36:31.216" v="114" actId="1036"/>
-            <ac:spMkLst>
-              <pc:docMk/>
-              <pc:sldMasterMk cId="1747979782" sldId="2147483665"/>
-              <pc:sldLayoutMk cId="55212957" sldId="2147483707"/>
-              <ac:spMk id="21" creationId="{F7C4A3BC-A435-421D-8A82-37891A0FDD53}"/>
-            </ac:spMkLst>
-          </pc:spChg>
-          <pc:spChg chg="del">
-            <ac:chgData name="Rafaela Boletti Duraes Souto" userId="78f52f2a-2d51-4833-a638-c8c75f30638a" providerId="ADAL" clId="{3072E378-0BC3-46EF-92A3-96EEAF7BEDB3}" dt="2025-03-31T19:29:30.011" v="24" actId="478"/>
-            <ac:spMkLst>
-              <pc:docMk/>
-              <pc:sldMasterMk cId="1747979782" sldId="2147483665"/>
-              <pc:sldLayoutMk cId="55212957" sldId="2147483707"/>
-              <ac:spMk id="24" creationId="{7B775188-12AA-429D-9869-77BE4B33066C}"/>
-            </ac:spMkLst>
-          </pc:spChg>
-          <pc:spChg chg="mod">
-            <ac:chgData name="Rafaela Boletti Duraes Souto" userId="78f52f2a-2d51-4833-a638-c8c75f30638a" providerId="ADAL" clId="{3072E378-0BC3-46EF-92A3-96EEAF7BEDB3}" dt="2025-03-31T19:38:06.233" v="150" actId="1035"/>
-            <ac:spMkLst>
-              <pc:docMk/>
-              <pc:sldMasterMk cId="1747979782" sldId="2147483665"/>
-              <pc:sldLayoutMk cId="55212957" sldId="2147483707"/>
-              <ac:spMk id="26" creationId="{D8183263-5E3B-494C-88C6-7C3034B4D6A1}"/>
-            </ac:spMkLst>
-          </pc:spChg>
-          <pc:grpChg chg="del">
-            <ac:chgData name="Rafaela Boletti Duraes Souto" userId="78f52f2a-2d51-4833-a638-c8c75f30638a" providerId="ADAL" clId="{3072E378-0BC3-46EF-92A3-96EEAF7BEDB3}" dt="2025-03-31T19:35:14.543" v="84" actId="165"/>
-            <ac:grpSpMkLst>
-              <pc:docMk/>
-              <pc:sldMasterMk cId="1747979782" sldId="2147483665"/>
-              <pc:sldLayoutMk cId="55212957" sldId="2147483707"/>
-              <ac:grpSpMk id="20" creationId="{C069DABA-CA51-481C-87E8-9591818EEB9F}"/>
-            </ac:grpSpMkLst>
-          </pc:grpChg>
-          <pc:grpChg chg="del">
-            <ac:chgData name="Rafaela Boletti Duraes Souto" userId="78f52f2a-2d51-4833-a638-c8c75f30638a" providerId="ADAL" clId="{3072E378-0BC3-46EF-92A3-96EEAF7BEDB3}" dt="2025-03-31T19:29:30.011" v="24" actId="478"/>
-            <ac:grpSpMkLst>
-              <pc:docMk/>
-              <pc:sldMasterMk cId="1747979782" sldId="2147483665"/>
-              <pc:sldLayoutMk cId="55212957" sldId="2147483707"/>
-              <ac:grpSpMk id="29" creationId="{8DFAB7D6-E7E6-46F4-BBEC-65BE09B78587}"/>
-            </ac:grpSpMkLst>
-          </pc:grpChg>
-          <pc:picChg chg="mod topLvl">
-            <ac:chgData name="Rafaela Boletti Duraes Souto" userId="78f52f2a-2d51-4833-a638-c8c75f30638a" providerId="ADAL" clId="{3072E378-0BC3-46EF-92A3-96EEAF7BEDB3}" dt="2025-03-31T19:37:22.911" v="126" actId="1035"/>
-            <ac:picMkLst>
-              <pc:docMk/>
-              <pc:sldMasterMk cId="1747979782" sldId="2147483665"/>
-              <pc:sldLayoutMk cId="55212957" sldId="2147483707"/>
-              <ac:picMk id="22" creationId="{1263C67A-E251-4E63-AFFC-72D246AACF3E}"/>
-            </ac:picMkLst>
-          </pc:picChg>
-        </pc:sldLayoutChg>
-        <pc:sldLayoutChg chg="addSp delSp modSp">
-          <pc:chgData name="Rafaela Boletti Duraes Souto" userId="78f52f2a-2d51-4833-a638-c8c75f30638a" providerId="ADAL" clId="{3072E378-0BC3-46EF-92A3-96EEAF7BEDB3}" dt="2025-03-31T19:38:09.304" v="152"/>
-          <pc:sldLayoutMkLst>
-            <pc:docMk/>
-            <pc:sldMasterMk cId="1747979782" sldId="2147483665"/>
-            <pc:sldLayoutMk cId="146151045" sldId="2147483709"/>
-          </pc:sldLayoutMkLst>
-          <pc:spChg chg="del">
-            <ac:chgData name="Rafaela Boletti Duraes Souto" userId="78f52f2a-2d51-4833-a638-c8c75f30638a" providerId="ADAL" clId="{3072E378-0BC3-46EF-92A3-96EEAF7BEDB3}" dt="2025-03-31T19:29:58.817" v="33" actId="478"/>
-            <ac:spMkLst>
-              <pc:docMk/>
-              <pc:sldMasterMk cId="1747979782" sldId="2147483665"/>
-              <pc:sldLayoutMk cId="146151045" sldId="2147483709"/>
-              <ac:spMk id="10" creationId="{A8169CCE-70A8-4A55-9703-5ADCA9EF0ABA}"/>
-            </ac:spMkLst>
-          </pc:spChg>
-          <pc:spChg chg="add ord">
-            <ac:chgData name="Rafaela Boletti Duraes Souto" userId="78f52f2a-2d51-4833-a638-c8c75f30638a" providerId="ADAL" clId="{3072E378-0BC3-46EF-92A3-96EEAF7BEDB3}" dt="2025-03-31T19:30:01.507" v="35" actId="167"/>
-            <ac:spMkLst>
-              <pc:docMk/>
-              <pc:sldMasterMk cId="1747979782" sldId="2147483665"/>
-              <pc:sldLayoutMk cId="146151045" sldId="2147483709"/>
-              <ac:spMk id="12" creationId="{CB8B345F-DD73-4E9E-AD18-F0BDD895895F}"/>
-            </ac:spMkLst>
-          </pc:spChg>
-          <pc:spChg chg="add ord">
-            <ac:chgData name="Rafaela Boletti Duraes Souto" userId="78f52f2a-2d51-4833-a638-c8c75f30638a" providerId="ADAL" clId="{3072E378-0BC3-46EF-92A3-96EEAF7BEDB3}" dt="2025-03-31T19:30:01.507" v="35" actId="167"/>
-            <ac:spMkLst>
-              <pc:docMk/>
-              <pc:sldMasterMk cId="1747979782" sldId="2147483665"/>
-              <pc:sldLayoutMk cId="146151045" sldId="2147483709"/>
-              <ac:spMk id="13" creationId="{AAA7EAE7-3CCE-4E3C-A01D-090F2B99EE33}"/>
-            </ac:spMkLst>
-          </pc:spChg>
-          <pc:spChg chg="add">
-            <ac:chgData name="Rafaela Boletti Duraes Souto" userId="78f52f2a-2d51-4833-a638-c8c75f30638a" providerId="ADAL" clId="{3072E378-0BC3-46EF-92A3-96EEAF7BEDB3}" dt="2025-03-31T19:38:09.304" v="152"/>
-            <ac:spMkLst>
-              <pc:docMk/>
-              <pc:sldMasterMk cId="1747979782" sldId="2147483665"/>
-              <pc:sldLayoutMk cId="146151045" sldId="2147483709"/>
-              <ac:spMk id="14" creationId="{A33EAE45-2991-47EF-ACAB-FE2855CD4F3A}"/>
-            </ac:spMkLst>
-          </pc:spChg>
-          <pc:spChg chg="mod">
-            <ac:chgData name="Rafaela Boletti Duraes Souto" userId="78f52f2a-2d51-4833-a638-c8c75f30638a" providerId="ADAL" clId="{3072E378-0BC3-46EF-92A3-96EEAF7BEDB3}" dt="2025-03-31T19:33:27.724" v="78" actId="207"/>
-            <ac:spMkLst>
-              <pc:docMk/>
-              <pc:sldMasterMk cId="1747979782" sldId="2147483665"/>
-              <pc:sldLayoutMk cId="146151045" sldId="2147483709"/>
-              <ac:spMk id="19" creationId="{ADA911F7-F870-4379-9B09-DFDDF9DDD2F1}"/>
-            </ac:spMkLst>
-          </pc:spChg>
-          <pc:grpChg chg="del">
-            <ac:chgData name="Rafaela Boletti Duraes Souto" userId="78f52f2a-2d51-4833-a638-c8c75f30638a" providerId="ADAL" clId="{3072E378-0BC3-46EF-92A3-96EEAF7BEDB3}" dt="2025-03-31T19:29:58.817" v="33" actId="478"/>
-            <ac:grpSpMkLst>
-              <pc:docMk/>
-              <pc:sldMasterMk cId="1747979782" sldId="2147483665"/>
-              <pc:sldLayoutMk cId="146151045" sldId="2147483709"/>
-              <ac:grpSpMk id="11" creationId="{BAFB1205-4E7F-4CC4-A3D8-AC7ADAF5F7B7}"/>
-            </ac:grpSpMkLst>
-          </pc:grpChg>
-          <pc:grpChg chg="del">
-            <ac:chgData name="Rafaela Boletti Duraes Souto" userId="78f52f2a-2d51-4833-a638-c8c75f30638a" providerId="ADAL" clId="{3072E378-0BC3-46EF-92A3-96EEAF7BEDB3}" dt="2025-03-31T19:38:08.487" v="151" actId="478"/>
-            <ac:grpSpMkLst>
-              <pc:docMk/>
-              <pc:sldMasterMk cId="1747979782" sldId="2147483665"/>
-              <pc:sldLayoutMk cId="146151045" sldId="2147483709"/>
-              <ac:grpSpMk id="20" creationId="{C069DABA-CA51-481C-87E8-9591818EEB9F}"/>
-            </ac:grpSpMkLst>
-          </pc:grpChg>
-          <pc:picChg chg="add">
-            <ac:chgData name="Rafaela Boletti Duraes Souto" userId="78f52f2a-2d51-4833-a638-c8c75f30638a" providerId="ADAL" clId="{3072E378-0BC3-46EF-92A3-96EEAF7BEDB3}" dt="2025-03-31T19:38:09.304" v="152"/>
-            <ac:picMkLst>
-              <pc:docMk/>
-              <pc:sldMasterMk cId="1747979782" sldId="2147483665"/>
-              <pc:sldLayoutMk cId="146151045" sldId="2147483709"/>
-              <ac:picMk id="15" creationId="{1C62AF46-3078-4248-B00F-CBF1C6498C23}"/>
-            </ac:picMkLst>
-          </pc:picChg>
-        </pc:sldLayoutChg>
-        <pc:sldLayoutChg chg="addSp delSp modSp">
-          <pc:chgData name="Rafaela Boletti Duraes Souto" userId="78f52f2a-2d51-4833-a638-c8c75f30638a" providerId="ADAL" clId="{3072E378-0BC3-46EF-92A3-96EEAF7BEDB3}" dt="2025-03-31T19:38:37.790" v="158" actId="1036"/>
-          <pc:sldLayoutMkLst>
-            <pc:docMk/>
-            <pc:sldMasterMk cId="1747979782" sldId="2147483665"/>
-            <pc:sldLayoutMk cId="1297693704" sldId="2147483712"/>
-          </pc:sldLayoutMkLst>
-          <pc:spChg chg="mod">
-            <ac:chgData name="Rafaela Boletti Duraes Souto" userId="78f52f2a-2d51-4833-a638-c8c75f30638a" providerId="ADAL" clId="{3072E378-0BC3-46EF-92A3-96EEAF7BEDB3}" dt="2025-03-31T19:38:37.790" v="158" actId="1036"/>
-            <ac:spMkLst>
-              <pc:docMk/>
-              <pc:sldMasterMk cId="1747979782" sldId="2147483665"/>
-              <pc:sldLayoutMk cId="1297693704" sldId="2147483712"/>
-              <ac:spMk id="9" creationId="{FA034C09-59DD-4564-9C6E-8F60F069EB37}"/>
-            </ac:spMkLst>
-          </pc:spChg>
-          <pc:spChg chg="del">
-            <ac:chgData name="Rafaela Boletti Duraes Souto" userId="78f52f2a-2d51-4833-a638-c8c75f30638a" providerId="ADAL" clId="{3072E378-0BC3-46EF-92A3-96EEAF7BEDB3}" dt="2025-03-31T19:31:35.961" v="67" actId="478"/>
-            <ac:spMkLst>
-              <pc:docMk/>
-              <pc:sldMasterMk cId="1747979782" sldId="2147483665"/>
-              <pc:sldLayoutMk cId="1297693704" sldId="2147483712"/>
-              <ac:spMk id="13" creationId="{E20FAD81-35E1-48C8-9B46-11AF26DF2396}"/>
-            </ac:spMkLst>
-          </pc:spChg>
-          <pc:spChg chg="add ord">
-            <ac:chgData name="Rafaela Boletti Duraes Souto" userId="78f52f2a-2d51-4833-a638-c8c75f30638a" providerId="ADAL" clId="{3072E378-0BC3-46EF-92A3-96EEAF7BEDB3}" dt="2025-03-31T19:31:38.103" v="69" actId="167"/>
-            <ac:spMkLst>
-              <pc:docMk/>
-              <pc:sldMasterMk cId="1747979782" sldId="2147483665"/>
-              <pc:sldLayoutMk cId="1297693704" sldId="2147483712"/>
-              <ac:spMk id="17" creationId="{586B8C82-BA24-43ED-B881-D6B28CBE9AD5}"/>
-            </ac:spMkLst>
-          </pc:spChg>
-          <pc:spChg chg="add ord">
-            <ac:chgData name="Rafaela Boletti Duraes Souto" userId="78f52f2a-2d51-4833-a638-c8c75f30638a" providerId="ADAL" clId="{3072E378-0BC3-46EF-92A3-96EEAF7BEDB3}" dt="2025-03-31T19:31:38.103" v="69" actId="167"/>
-            <ac:spMkLst>
-              <pc:docMk/>
-              <pc:sldMasterMk cId="1747979782" sldId="2147483665"/>
-              <pc:sldLayoutMk cId="1297693704" sldId="2147483712"/>
-              <ac:spMk id="18" creationId="{6FDE99D1-FAD1-4848-84A2-DBF5A7412528}"/>
-            </ac:spMkLst>
-          </pc:spChg>
-          <pc:spChg chg="add">
-            <ac:chgData name="Rafaela Boletti Duraes Souto" userId="78f52f2a-2d51-4833-a638-c8c75f30638a" providerId="ADAL" clId="{3072E378-0BC3-46EF-92A3-96EEAF7BEDB3}" dt="2025-03-31T19:38:33.151" v="156"/>
-            <ac:spMkLst>
-              <pc:docMk/>
-              <pc:sldMasterMk cId="1747979782" sldId="2147483665"/>
-              <pc:sldLayoutMk cId="1297693704" sldId="2147483712"/>
-              <ac:spMk id="19" creationId="{86405306-4DCF-48DF-8A09-F75E67FE213E}"/>
-            </ac:spMkLst>
-          </pc:spChg>
-          <pc:grpChg chg="del">
-            <ac:chgData name="Rafaela Boletti Duraes Souto" userId="78f52f2a-2d51-4833-a638-c8c75f30638a" providerId="ADAL" clId="{3072E378-0BC3-46EF-92A3-96EEAF7BEDB3}" dt="2025-03-31T19:38:32.234" v="155" actId="478"/>
-            <ac:grpSpMkLst>
-              <pc:docMk/>
-              <pc:sldMasterMk cId="1747979782" sldId="2147483665"/>
-              <pc:sldLayoutMk cId="1297693704" sldId="2147483712"/>
-              <ac:grpSpMk id="10" creationId="{86C6CB5B-AE2B-4093-8335-D3DCCA9390B2}"/>
-            </ac:grpSpMkLst>
-          </pc:grpChg>
-          <pc:grpChg chg="del">
-            <ac:chgData name="Rafaela Boletti Duraes Souto" userId="78f52f2a-2d51-4833-a638-c8c75f30638a" providerId="ADAL" clId="{3072E378-0BC3-46EF-92A3-96EEAF7BEDB3}" dt="2025-03-31T19:31:35.961" v="67" actId="478"/>
-            <ac:grpSpMkLst>
-              <pc:docMk/>
-              <pc:sldMasterMk cId="1747979782" sldId="2147483665"/>
-              <pc:sldLayoutMk cId="1297693704" sldId="2147483712"/>
-              <ac:grpSpMk id="14" creationId="{181AE9B7-E269-4192-B859-3126C08691AB}"/>
-            </ac:grpSpMkLst>
-          </pc:grpChg>
-          <pc:picChg chg="add">
-            <ac:chgData name="Rafaela Boletti Duraes Souto" userId="78f52f2a-2d51-4833-a638-c8c75f30638a" providerId="ADAL" clId="{3072E378-0BC3-46EF-92A3-96EEAF7BEDB3}" dt="2025-03-31T19:38:33.151" v="156"/>
-            <ac:picMkLst>
-              <pc:docMk/>
-              <pc:sldMasterMk cId="1747979782" sldId="2147483665"/>
-              <pc:sldLayoutMk cId="1297693704" sldId="2147483712"/>
-              <ac:picMk id="20" creationId="{0421E441-036C-41E4-A3E6-3214E17B2DAF}"/>
-            </ac:picMkLst>
-          </pc:picChg>
-        </pc:sldLayoutChg>
-        <pc:sldLayoutChg chg="addSp delSp modSp">
-          <pc:chgData name="Rafaela Boletti Duraes Souto" userId="78f52f2a-2d51-4833-a638-c8c75f30638a" providerId="ADAL" clId="{3072E378-0BC3-46EF-92A3-96EEAF7BEDB3}" dt="2025-03-31T19:38:45.389" v="162" actId="1036"/>
-          <pc:sldLayoutMkLst>
-            <pc:docMk/>
-            <pc:sldMasterMk cId="1747979782" sldId="2147483665"/>
-            <pc:sldLayoutMk cId="624351883" sldId="2147483717"/>
-          </pc:sldLayoutMkLst>
-          <pc:spChg chg="del">
-            <ac:chgData name="Rafaela Boletti Duraes Souto" userId="78f52f2a-2d51-4833-a638-c8c75f30638a" providerId="ADAL" clId="{3072E378-0BC3-46EF-92A3-96EEAF7BEDB3}" dt="2025-03-31T19:30:22.246" v="41" actId="478"/>
-            <ac:spMkLst>
-              <pc:docMk/>
-              <pc:sldMasterMk cId="1747979782" sldId="2147483665"/>
-              <pc:sldLayoutMk cId="624351883" sldId="2147483717"/>
-              <ac:spMk id="10" creationId="{0C380D5A-024A-40AB-82C9-3891C85E4301}"/>
-            </ac:spMkLst>
-          </pc:spChg>
-          <pc:spChg chg="add ord">
-            <ac:chgData name="Rafaela Boletti Duraes Souto" userId="78f52f2a-2d51-4833-a638-c8c75f30638a" providerId="ADAL" clId="{3072E378-0BC3-46EF-92A3-96EEAF7BEDB3}" dt="2025-03-31T19:30:24.297" v="43" actId="167"/>
-            <ac:spMkLst>
-              <pc:docMk/>
-              <pc:sldMasterMk cId="1747979782" sldId="2147483665"/>
-              <pc:sldLayoutMk cId="624351883" sldId="2147483717"/>
-              <ac:spMk id="12" creationId="{359C996F-A9FF-46AF-912B-E9F9F88973D2}"/>
-            </ac:spMkLst>
-          </pc:spChg>
-          <pc:spChg chg="add ord">
-            <ac:chgData name="Rafaela Boletti Duraes Souto" userId="78f52f2a-2d51-4833-a638-c8c75f30638a" providerId="ADAL" clId="{3072E378-0BC3-46EF-92A3-96EEAF7BEDB3}" dt="2025-03-31T19:30:24.297" v="43" actId="167"/>
-            <ac:spMkLst>
-              <pc:docMk/>
-              <pc:sldMasterMk cId="1747979782" sldId="2147483665"/>
-              <pc:sldLayoutMk cId="624351883" sldId="2147483717"/>
-              <ac:spMk id="13" creationId="{2B61BDD0-D1CD-43CD-B797-17F13A04B17E}"/>
-            </ac:spMkLst>
-          </pc:spChg>
-          <pc:spChg chg="add">
-            <ac:chgData name="Rafaela Boletti Duraes Souto" userId="78f52f2a-2d51-4833-a638-c8c75f30638a" providerId="ADAL" clId="{3072E378-0BC3-46EF-92A3-96EEAF7BEDB3}" dt="2025-03-31T19:38:41.983" v="160"/>
-            <ac:spMkLst>
-              <pc:docMk/>
-              <pc:sldMasterMk cId="1747979782" sldId="2147483665"/>
-              <pc:sldLayoutMk cId="624351883" sldId="2147483717"/>
-              <ac:spMk id="14" creationId="{2EE99BE3-8DF3-4BFB-8A05-51FEC2EF2134}"/>
-            </ac:spMkLst>
-          </pc:spChg>
-          <pc:spChg chg="mod">
-            <ac:chgData name="Rafaela Boletti Duraes Souto" userId="78f52f2a-2d51-4833-a638-c8c75f30638a" providerId="ADAL" clId="{3072E378-0BC3-46EF-92A3-96EEAF7BEDB3}" dt="2025-03-31T19:38:45.389" v="162" actId="1036"/>
-            <ac:spMkLst>
-              <pc:docMk/>
-              <pc:sldMasterMk cId="1747979782" sldId="2147483665"/>
-              <pc:sldLayoutMk cId="624351883" sldId="2147483717"/>
-              <ac:spMk id="19" creationId="{ADA911F7-F870-4379-9B09-DFDDF9DDD2F1}"/>
-            </ac:spMkLst>
-          </pc:spChg>
-          <pc:grpChg chg="del">
-            <ac:chgData name="Rafaela Boletti Duraes Souto" userId="78f52f2a-2d51-4833-a638-c8c75f30638a" providerId="ADAL" clId="{3072E378-0BC3-46EF-92A3-96EEAF7BEDB3}" dt="2025-03-31T19:30:22.246" v="41" actId="478"/>
-            <ac:grpSpMkLst>
-              <pc:docMk/>
-              <pc:sldMasterMk cId="1747979782" sldId="2147483665"/>
-              <pc:sldLayoutMk cId="624351883" sldId="2147483717"/>
-              <ac:grpSpMk id="11" creationId="{9237D9B4-B9B7-4365-BF7E-0B8D69DBC5A8}"/>
-            </ac:grpSpMkLst>
-          </pc:grpChg>
-          <pc:grpChg chg="del">
-            <ac:chgData name="Rafaela Boletti Duraes Souto" userId="78f52f2a-2d51-4833-a638-c8c75f30638a" providerId="ADAL" clId="{3072E378-0BC3-46EF-92A3-96EEAF7BEDB3}" dt="2025-03-31T19:38:41.134" v="159" actId="478"/>
-            <ac:grpSpMkLst>
-              <pc:docMk/>
-              <pc:sldMasterMk cId="1747979782" sldId="2147483665"/>
-              <pc:sldLayoutMk cId="624351883" sldId="2147483717"/>
-              <ac:grpSpMk id="20" creationId="{C069DABA-CA51-481C-87E8-9591818EEB9F}"/>
-            </ac:grpSpMkLst>
-          </pc:grpChg>
-          <pc:picChg chg="add">
-            <ac:chgData name="Rafaela Boletti Duraes Souto" userId="78f52f2a-2d51-4833-a638-c8c75f30638a" providerId="ADAL" clId="{3072E378-0BC3-46EF-92A3-96EEAF7BEDB3}" dt="2025-03-31T19:38:41.983" v="160"/>
-            <ac:picMkLst>
-              <pc:docMk/>
-              <pc:sldMasterMk cId="1747979782" sldId="2147483665"/>
-              <pc:sldLayoutMk cId="624351883" sldId="2147483717"/>
-              <ac:picMk id="15" creationId="{E712451E-8E40-432D-87B5-6250EDB8896F}"/>
-            </ac:picMkLst>
-          </pc:picChg>
-        </pc:sldLayoutChg>
-        <pc:sldLayoutChg chg="addSp delSp modSp">
-          <pc:chgData name="Rafaela Boletti Duraes Souto" userId="78f52f2a-2d51-4833-a638-c8c75f30638a" providerId="ADAL" clId="{3072E378-0BC3-46EF-92A3-96EEAF7BEDB3}" dt="2025-03-31T19:38:51.618" v="164"/>
-          <pc:sldLayoutMkLst>
-            <pc:docMk/>
-            <pc:sldMasterMk cId="1747979782" sldId="2147483665"/>
-            <pc:sldLayoutMk cId="3489669611" sldId="2147483720"/>
-          </pc:sldLayoutMkLst>
-          <pc:spChg chg="del">
-            <ac:chgData name="Rafaela Boletti Duraes Souto" userId="78f52f2a-2d51-4833-a638-c8c75f30638a" providerId="ADAL" clId="{3072E378-0BC3-46EF-92A3-96EEAF7BEDB3}" dt="2025-03-31T19:30:34.531" v="49" actId="478"/>
-            <ac:spMkLst>
-              <pc:docMk/>
-              <pc:sldMasterMk cId="1747979782" sldId="2147483665"/>
-              <pc:sldLayoutMk cId="3489669611" sldId="2147483720"/>
-              <ac:spMk id="10" creationId="{70CF85F6-5897-4F2C-ACE3-C1D77CCDE1EB}"/>
-            </ac:spMkLst>
-          </pc:spChg>
-          <pc:spChg chg="add mod ord">
-            <ac:chgData name="Rafaela Boletti Duraes Souto" userId="78f52f2a-2d51-4833-a638-c8c75f30638a" providerId="ADAL" clId="{3072E378-0BC3-46EF-92A3-96EEAF7BEDB3}" dt="2025-03-31T19:30:40.479" v="53" actId="1076"/>
-            <ac:spMkLst>
-              <pc:docMk/>
-              <pc:sldMasterMk cId="1747979782" sldId="2147483665"/>
-              <pc:sldLayoutMk cId="3489669611" sldId="2147483720"/>
-              <ac:spMk id="12" creationId="{C317ABBE-DB15-4149-813B-3ADD5448080E}"/>
-            </ac:spMkLst>
-          </pc:spChg>
-          <pc:spChg chg="add ord">
-            <ac:chgData name="Rafaela Boletti Duraes Souto" userId="78f52f2a-2d51-4833-a638-c8c75f30638a" providerId="ADAL" clId="{3072E378-0BC3-46EF-92A3-96EEAF7BEDB3}" dt="2025-03-31T19:30:37.151" v="51" actId="167"/>
-            <ac:spMkLst>
-              <pc:docMk/>
-              <pc:sldMasterMk cId="1747979782" sldId="2147483665"/>
-              <pc:sldLayoutMk cId="3489669611" sldId="2147483720"/>
-              <ac:spMk id="13" creationId="{C45198F2-44DE-4961-A534-C46D8B0C74E3}"/>
-            </ac:spMkLst>
-          </pc:spChg>
-          <pc:spChg chg="add">
-            <ac:chgData name="Rafaela Boletti Duraes Souto" userId="78f52f2a-2d51-4833-a638-c8c75f30638a" providerId="ADAL" clId="{3072E378-0BC3-46EF-92A3-96EEAF7BEDB3}" dt="2025-03-31T19:38:51.618" v="164"/>
-            <ac:spMkLst>
-              <pc:docMk/>
-              <pc:sldMasterMk cId="1747979782" sldId="2147483665"/>
-              <pc:sldLayoutMk cId="3489669611" sldId="2147483720"/>
-              <ac:spMk id="14" creationId="{0ABE0133-416C-47CF-B81B-B2CC98AD4EEB}"/>
-            </ac:spMkLst>
-          </pc:spChg>
-          <pc:spChg chg="mod">
-            <ac:chgData name="Rafaela Boletti Duraes Souto" userId="78f52f2a-2d51-4833-a638-c8c75f30638a" providerId="ADAL" clId="{3072E378-0BC3-46EF-92A3-96EEAF7BEDB3}" dt="2025-03-31T19:33:46.211" v="82" actId="207"/>
-            <ac:spMkLst>
-              <pc:docMk/>
-              <pc:sldMasterMk cId="1747979782" sldId="2147483665"/>
-              <pc:sldLayoutMk cId="3489669611" sldId="2147483720"/>
-              <ac:spMk id="19" creationId="{ADA911F7-F870-4379-9B09-DFDDF9DDD2F1}"/>
-            </ac:spMkLst>
-          </pc:spChg>
-          <pc:grpChg chg="del">
-            <ac:chgData name="Rafaela Boletti Duraes Souto" userId="78f52f2a-2d51-4833-a638-c8c75f30638a" providerId="ADAL" clId="{3072E378-0BC3-46EF-92A3-96EEAF7BEDB3}" dt="2025-03-31T19:30:34.531" v="49" actId="478"/>
-            <ac:grpSpMkLst>
-              <pc:docMk/>
-              <pc:sldMasterMk cId="1747979782" sldId="2147483665"/>
-              <pc:sldLayoutMk cId="3489669611" sldId="2147483720"/>
-              <ac:grpSpMk id="11" creationId="{47791B01-4BA3-4668-99A7-74F000004E87}"/>
-            </ac:grpSpMkLst>
-          </pc:grpChg>
-          <pc:grpChg chg="del">
-            <ac:chgData name="Rafaela Boletti Duraes Souto" userId="78f52f2a-2d51-4833-a638-c8c75f30638a" providerId="ADAL" clId="{3072E378-0BC3-46EF-92A3-96EEAF7BEDB3}" dt="2025-03-31T19:38:50.785" v="163" actId="478"/>
-            <ac:grpSpMkLst>
-              <pc:docMk/>
-              <pc:sldMasterMk cId="1747979782" sldId="2147483665"/>
-              <pc:sldLayoutMk cId="3489669611" sldId="2147483720"/>
-              <ac:grpSpMk id="20" creationId="{C069DABA-CA51-481C-87E8-9591818EEB9F}"/>
-            </ac:grpSpMkLst>
-          </pc:grpChg>
-          <pc:picChg chg="add">
-            <ac:chgData name="Rafaela Boletti Duraes Souto" userId="78f52f2a-2d51-4833-a638-c8c75f30638a" providerId="ADAL" clId="{3072E378-0BC3-46EF-92A3-96EEAF7BEDB3}" dt="2025-03-31T19:38:51.618" v="164"/>
-            <ac:picMkLst>
-              <pc:docMk/>
-              <pc:sldMasterMk cId="1747979782" sldId="2147483665"/>
-              <pc:sldLayoutMk cId="3489669611" sldId="2147483720"/>
-              <ac:picMk id="15" creationId="{A4E1A8AE-6DB4-44EB-B1FD-99C8B7173577}"/>
-            </ac:picMkLst>
-          </pc:picChg>
-        </pc:sldLayoutChg>
-        <pc:sldLayoutChg chg="addSp delSp modSp">
-          <pc:chgData name="Rafaela Boletti Duraes Souto" userId="78f52f2a-2d51-4833-a638-c8c75f30638a" providerId="ADAL" clId="{3072E378-0BC3-46EF-92A3-96EEAF7BEDB3}" dt="2025-03-31T19:38:58.148" v="167" actId="1035"/>
-          <pc:sldLayoutMkLst>
-            <pc:docMk/>
-            <pc:sldMasterMk cId="1747979782" sldId="2147483665"/>
-            <pc:sldLayoutMk cId="3225192626" sldId="2147483723"/>
-          </pc:sldLayoutMkLst>
-          <pc:spChg chg="del">
-            <ac:chgData name="Rafaela Boletti Duraes Souto" userId="78f52f2a-2d51-4833-a638-c8c75f30638a" providerId="ADAL" clId="{3072E378-0BC3-46EF-92A3-96EEAF7BEDB3}" dt="2025-03-31T19:30:53.506" v="63" actId="478"/>
-            <ac:spMkLst>
-              <pc:docMk/>
-              <pc:sldMasterMk cId="1747979782" sldId="2147483665"/>
-              <pc:sldLayoutMk cId="3225192626" sldId="2147483723"/>
-              <ac:spMk id="10" creationId="{9792DA56-F790-49D8-985D-505DF7118619}"/>
-            </ac:spMkLst>
-          </pc:spChg>
-          <pc:spChg chg="add ord">
-            <ac:chgData name="Rafaela Boletti Duraes Souto" userId="78f52f2a-2d51-4833-a638-c8c75f30638a" providerId="ADAL" clId="{3072E378-0BC3-46EF-92A3-96EEAF7BEDB3}" dt="2025-03-31T19:30:56.055" v="65" actId="167"/>
-            <ac:spMkLst>
-              <pc:docMk/>
-              <pc:sldMasterMk cId="1747979782" sldId="2147483665"/>
-              <pc:sldLayoutMk cId="3225192626" sldId="2147483723"/>
-              <ac:spMk id="12" creationId="{A516510E-9335-4067-A60E-F2456A555679}"/>
-            </ac:spMkLst>
-          </pc:spChg>
-          <pc:spChg chg="add ord">
-            <ac:chgData name="Rafaela Boletti Duraes Souto" userId="78f52f2a-2d51-4833-a638-c8c75f30638a" providerId="ADAL" clId="{3072E378-0BC3-46EF-92A3-96EEAF7BEDB3}" dt="2025-03-31T19:30:56.055" v="65" actId="167"/>
-            <ac:spMkLst>
-              <pc:docMk/>
-              <pc:sldMasterMk cId="1747979782" sldId="2147483665"/>
-              <pc:sldLayoutMk cId="3225192626" sldId="2147483723"/>
-              <ac:spMk id="13" creationId="{DED44ED0-82C6-40AD-B891-FF21542191E5}"/>
-            </ac:spMkLst>
-          </pc:spChg>
-          <pc:spChg chg="add">
-            <ac:chgData name="Rafaela Boletti Duraes Souto" userId="78f52f2a-2d51-4833-a638-c8c75f30638a" providerId="ADAL" clId="{3072E378-0BC3-46EF-92A3-96EEAF7BEDB3}" dt="2025-03-31T19:38:56.180" v="166"/>
-            <ac:spMkLst>
-              <pc:docMk/>
-              <pc:sldMasterMk cId="1747979782" sldId="2147483665"/>
-              <pc:sldLayoutMk cId="3225192626" sldId="2147483723"/>
-              <ac:spMk id="14" creationId="{08475F97-CB6A-407B-B049-799721993F6C}"/>
-            </ac:spMkLst>
-          </pc:spChg>
-          <pc:spChg chg="mod">
-            <ac:chgData name="Rafaela Boletti Duraes Souto" userId="78f52f2a-2d51-4833-a638-c8c75f30638a" providerId="ADAL" clId="{3072E378-0BC3-46EF-92A3-96EEAF7BEDB3}" dt="2025-03-31T19:38:58.148" v="167" actId="1035"/>
-            <ac:spMkLst>
-              <pc:docMk/>
-              <pc:sldMasterMk cId="1747979782" sldId="2147483665"/>
-              <pc:sldLayoutMk cId="3225192626" sldId="2147483723"/>
-              <ac:spMk id="19" creationId="{ADA911F7-F870-4379-9B09-DFDDF9DDD2F1}"/>
-            </ac:spMkLst>
-          </pc:spChg>
-          <pc:grpChg chg="del">
-            <ac:chgData name="Rafaela Boletti Duraes Souto" userId="78f52f2a-2d51-4833-a638-c8c75f30638a" providerId="ADAL" clId="{3072E378-0BC3-46EF-92A3-96EEAF7BEDB3}" dt="2025-03-31T19:30:53.506" v="63" actId="478"/>
-            <ac:grpSpMkLst>
-              <pc:docMk/>
-              <pc:sldMasterMk cId="1747979782" sldId="2147483665"/>
-              <pc:sldLayoutMk cId="3225192626" sldId="2147483723"/>
-              <ac:grpSpMk id="11" creationId="{979F5B29-E1E5-462C-B976-4F0266C2E6DC}"/>
-            </ac:grpSpMkLst>
-          </pc:grpChg>
-          <pc:grpChg chg="del">
-            <ac:chgData name="Rafaela Boletti Duraes Souto" userId="78f52f2a-2d51-4833-a638-c8c75f30638a" providerId="ADAL" clId="{3072E378-0BC3-46EF-92A3-96EEAF7BEDB3}" dt="2025-03-31T19:38:55.378" v="165" actId="478"/>
-            <ac:grpSpMkLst>
-              <pc:docMk/>
-              <pc:sldMasterMk cId="1747979782" sldId="2147483665"/>
-              <pc:sldLayoutMk cId="3225192626" sldId="2147483723"/>
-              <ac:grpSpMk id="20" creationId="{C069DABA-CA51-481C-87E8-9591818EEB9F}"/>
-            </ac:grpSpMkLst>
-          </pc:grpChg>
-          <pc:picChg chg="add">
-            <ac:chgData name="Rafaela Boletti Duraes Souto" userId="78f52f2a-2d51-4833-a638-c8c75f30638a" providerId="ADAL" clId="{3072E378-0BC3-46EF-92A3-96EEAF7BEDB3}" dt="2025-03-31T19:38:56.180" v="166"/>
-            <ac:picMkLst>
-              <pc:docMk/>
-              <pc:sldMasterMk cId="1747979782" sldId="2147483665"/>
-              <pc:sldLayoutMk cId="3225192626" sldId="2147483723"/>
-              <ac:picMk id="15" creationId="{F1C10FAA-1757-40FC-92FB-09999E973892}"/>
-            </ac:picMkLst>
-          </pc:picChg>
-        </pc:sldLayoutChg>
-      </pc:sldMasterChg>
-    </pc:docChg>
-  </pc:docChgLst>
-  <pc:docChgLst>
-    <pc:chgData name="Rafaela Boletti Duraes Souto" userId="78f52f2a-2d51-4833-a638-c8c75f30638a" providerId="ADAL" clId="{7B60E563-4518-4CCE-974E-BC91E59A0147}"/>
-    <pc:docChg chg="custSel modSld modMainMaster">
-      <pc:chgData name="Rafaela Boletti Duraes Souto" userId="78f52f2a-2d51-4833-a638-c8c75f30638a" providerId="ADAL" clId="{7B60E563-4518-4CCE-974E-BC91E59A0147}" dt="2025-04-29T21:36:12.739" v="53"/>
-      <pc:docMkLst>
-        <pc:docMk/>
-      </pc:docMkLst>
-      <pc:sldChg chg="addSp delSp modSp modTransition">
-        <pc:chgData name="Rafaela Boletti Duraes Souto" userId="78f52f2a-2d51-4833-a638-c8c75f30638a" providerId="ADAL" clId="{7B60E563-4518-4CCE-974E-BC91E59A0147}" dt="2025-04-29T21:04:24.898" v="11"/>
-        <pc:sldMkLst>
-          <pc:docMk/>
-          <pc:sldMk cId="4066044570" sldId="302"/>
-        </pc:sldMkLst>
-        <pc:spChg chg="add del mod">
-          <ac:chgData name="Rafaela Boletti Duraes Souto" userId="78f52f2a-2d51-4833-a638-c8c75f30638a" providerId="ADAL" clId="{7B60E563-4518-4CCE-974E-BC91E59A0147}" dt="2025-04-29T21:04:24.898" v="11"/>
-          <ac:spMkLst>
-            <pc:docMk/>
-            <pc:sldMk cId="4066044570" sldId="302"/>
-            <ac:spMk id="2" creationId="{9F231F41-DE0E-41DF-BB7D-7FA8E186AB3E}"/>
-          </ac:spMkLst>
-        </pc:spChg>
-        <pc:spChg chg="del">
-          <ac:chgData name="Rafaela Boletti Duraes Souto" userId="78f52f2a-2d51-4833-a638-c8c75f30638a" providerId="ADAL" clId="{7B60E563-4518-4CCE-974E-BC91E59A0147}" dt="2025-04-29T21:03:30.899" v="2" actId="478"/>
-          <ac:spMkLst>
-            <pc:docMk/>
-            <pc:sldMk cId="4066044570" sldId="302"/>
-            <ac:spMk id="15" creationId="{092505F5-26C8-47F6-A403-BDC0170A7BD8}"/>
-          </ac:spMkLst>
-        </pc:spChg>
-        <pc:spChg chg="del">
-          <ac:chgData name="Rafaela Boletti Duraes Souto" userId="78f52f2a-2d51-4833-a638-c8c75f30638a" providerId="ADAL" clId="{7B60E563-4518-4CCE-974E-BC91E59A0147}" dt="2025-04-29T21:03:30.899" v="2" actId="478"/>
-          <ac:spMkLst>
-            <pc:docMk/>
-            <pc:sldMk cId="4066044570" sldId="302"/>
-            <ac:spMk id="16" creationId="{A02D35F1-A64B-46CB-A5EC-ACDCB8E3C672}"/>
-          </ac:spMkLst>
-        </pc:spChg>
-      </pc:sldChg>
-      <pc:sldChg chg="addSp delSp modSp">
-        <pc:chgData name="Rafaela Boletti Duraes Souto" userId="78f52f2a-2d51-4833-a638-c8c75f30638a" providerId="ADAL" clId="{7B60E563-4518-4CCE-974E-BC91E59A0147}" dt="2025-04-29T21:07:33.511" v="17"/>
-        <pc:sldMkLst>
-          <pc:docMk/>
-          <pc:sldMk cId="2984868962" sldId="312"/>
-        </pc:sldMkLst>
-        <pc:spChg chg="add mod">
-          <ac:chgData name="Rafaela Boletti Duraes Souto" userId="78f52f2a-2d51-4833-a638-c8c75f30638a" providerId="ADAL" clId="{7B60E563-4518-4CCE-974E-BC91E59A0147}" dt="2025-04-29T21:07:33.511" v="17"/>
-          <ac:spMkLst>
-            <pc:docMk/>
-            <pc:sldMk cId="2984868962" sldId="312"/>
-            <ac:spMk id="2" creationId="{C8A98C7A-BAE4-4DD1-9E86-6025D146E1E0}"/>
-          </ac:spMkLst>
-        </pc:spChg>
-        <pc:spChg chg="del">
-          <ac:chgData name="Rafaela Boletti Duraes Souto" userId="78f52f2a-2d51-4833-a638-c8c75f30638a" providerId="ADAL" clId="{7B60E563-4518-4CCE-974E-BC91E59A0147}" dt="2025-04-29T21:07:33.511" v="17"/>
-          <ac:spMkLst>
-            <pc:docMk/>
-            <pc:sldMk cId="2984868962" sldId="312"/>
-            <ac:spMk id="3" creationId="{83BC5E27-869E-4E52-8C23-1A88190FF1FD}"/>
-          </ac:spMkLst>
-        </pc:spChg>
-      </pc:sldChg>
-      <pc:sldChg chg="addSp delSp modSp">
-        <pc:chgData name="Rafaela Boletti Duraes Souto" userId="78f52f2a-2d51-4833-a638-c8c75f30638a" providerId="ADAL" clId="{7B60E563-4518-4CCE-974E-BC91E59A0147}" dt="2025-04-29T21:07:35.493" v="18"/>
-        <pc:sldMkLst>
-          <pc:docMk/>
-          <pc:sldMk cId="3721016461" sldId="313"/>
-        </pc:sldMkLst>
-        <pc:spChg chg="add mod">
-          <ac:chgData name="Rafaela Boletti Duraes Souto" userId="78f52f2a-2d51-4833-a638-c8c75f30638a" providerId="ADAL" clId="{7B60E563-4518-4CCE-974E-BC91E59A0147}" dt="2025-04-29T21:07:35.493" v="18"/>
-          <ac:spMkLst>
-            <pc:docMk/>
-            <pc:sldMk cId="3721016461" sldId="313"/>
-            <ac:spMk id="2" creationId="{EBB9E76C-9781-4241-9EA6-1A9699B5FA12}"/>
-          </ac:spMkLst>
-        </pc:spChg>
-        <pc:spChg chg="del">
-          <ac:chgData name="Rafaela Boletti Duraes Souto" userId="78f52f2a-2d51-4833-a638-c8c75f30638a" providerId="ADAL" clId="{7B60E563-4518-4CCE-974E-BC91E59A0147}" dt="2025-04-29T21:07:35.493" v="18"/>
-          <ac:spMkLst>
-            <pc:docMk/>
-            <pc:sldMk cId="3721016461" sldId="313"/>
-            <ac:spMk id="3" creationId="{DB1C159C-7410-4EF7-972C-F88286D33B08}"/>
-          </ac:spMkLst>
-        </pc:spChg>
-      </pc:sldChg>
-      <pc:sldChg chg="addSp delSp modSp">
-        <pc:chgData name="Rafaela Boletti Duraes Souto" userId="78f52f2a-2d51-4833-a638-c8c75f30638a" providerId="ADAL" clId="{7B60E563-4518-4CCE-974E-BC91E59A0147}" dt="2025-04-29T21:05:24.806" v="14"/>
-        <pc:sldMkLst>
-          <pc:docMk/>
-          <pc:sldMk cId="1551092304" sldId="315"/>
-        </pc:sldMkLst>
-        <pc:spChg chg="del">
-          <ac:chgData name="Rafaela Boletti Duraes Souto" userId="78f52f2a-2d51-4833-a638-c8c75f30638a" providerId="ADAL" clId="{7B60E563-4518-4CCE-974E-BC91E59A0147}" dt="2025-04-29T21:05:24.806" v="14"/>
-          <ac:spMkLst>
-            <pc:docMk/>
-            <pc:sldMk cId="1551092304" sldId="315"/>
-            <ac:spMk id="2" creationId="{2B201FDC-EEFE-4123-AA7D-7D03AD1F36D4}"/>
-          </ac:spMkLst>
-        </pc:spChg>
-        <pc:spChg chg="add mod">
-          <ac:chgData name="Rafaela Boletti Duraes Souto" userId="78f52f2a-2d51-4833-a638-c8c75f30638a" providerId="ADAL" clId="{7B60E563-4518-4CCE-974E-BC91E59A0147}" dt="2025-04-29T21:05:24.806" v="14"/>
-          <ac:spMkLst>
-            <pc:docMk/>
-            <pc:sldMk cId="1551092304" sldId="315"/>
-            <ac:spMk id="3" creationId="{95F7FFF7-0231-4EE2-80F2-F6CCED02B31A}"/>
-          </ac:spMkLst>
-        </pc:spChg>
-      </pc:sldChg>
-      <pc:sldChg chg="addSp delSp modSp">
-        <pc:chgData name="Rafaela Boletti Duraes Souto" userId="78f52f2a-2d51-4833-a638-c8c75f30638a" providerId="ADAL" clId="{7B60E563-4518-4CCE-974E-BC91E59A0147}" dt="2025-04-29T21:36:12.739" v="53"/>
-        <pc:sldMkLst>
-          <pc:docMk/>
-          <pc:sldMk cId="327908660" sldId="318"/>
-        </pc:sldMkLst>
-        <pc:spChg chg="del">
-          <ac:chgData name="Rafaela Boletti Duraes Souto" userId="78f52f2a-2d51-4833-a638-c8c75f30638a" providerId="ADAL" clId="{7B60E563-4518-4CCE-974E-BC91E59A0147}" dt="2025-04-29T21:08:17.440" v="21"/>
-          <ac:spMkLst>
-            <pc:docMk/>
-            <pc:sldMk cId="327908660" sldId="318"/>
-            <ac:spMk id="2" creationId="{7E6B4A78-8D24-0B17-EFF1-5C8AF956FEE1}"/>
-          </ac:spMkLst>
-        </pc:spChg>
-        <pc:spChg chg="add mod">
-          <ac:chgData name="Rafaela Boletti Duraes Souto" userId="78f52f2a-2d51-4833-a638-c8c75f30638a" providerId="ADAL" clId="{7B60E563-4518-4CCE-974E-BC91E59A0147}" dt="2025-04-29T21:36:12.739" v="53"/>
-          <ac:spMkLst>
-            <pc:docMk/>
-            <pc:sldMk cId="327908660" sldId="318"/>
-            <ac:spMk id="2" creationId="{A46847EC-883E-4593-9D15-4DF2EAA68AE8}"/>
-          </ac:spMkLst>
-        </pc:spChg>
-        <pc:spChg chg="add del mod">
-          <ac:chgData name="Rafaela Boletti Duraes Souto" userId="78f52f2a-2d51-4833-a638-c8c75f30638a" providerId="ADAL" clId="{7B60E563-4518-4CCE-974E-BC91E59A0147}" dt="2025-04-29T21:36:12.739" v="53"/>
-          <ac:spMkLst>
-            <pc:docMk/>
-            <pc:sldMk cId="327908660" sldId="318"/>
-            <ac:spMk id="3" creationId="{24990043-50DA-4C7E-AC8F-3E08D31AC26E}"/>
-          </ac:spMkLst>
-        </pc:spChg>
-      </pc:sldChg>
-      <pc:sldMasterChg chg="modSldLayout">
-        <pc:chgData name="Rafaela Boletti Duraes Souto" userId="78f52f2a-2d51-4833-a638-c8c75f30638a" providerId="ADAL" clId="{7B60E563-4518-4CCE-974E-BC91E59A0147}" dt="2025-04-29T21:36:03.166" v="52" actId="20577"/>
-        <pc:sldMasterMkLst>
-          <pc:docMk/>
-          <pc:sldMasterMk cId="1747979782" sldId="2147483665"/>
-        </pc:sldMasterMkLst>
-        <pc:sldLayoutChg chg="addSp delSp">
-          <pc:chgData name="Rafaela Boletti Duraes Souto" userId="78f52f2a-2d51-4833-a638-c8c75f30638a" providerId="ADAL" clId="{7B60E563-4518-4CCE-974E-BC91E59A0147}" dt="2025-04-29T21:04:23.749" v="10"/>
-          <pc:sldLayoutMkLst>
-            <pc:docMk/>
-            <pc:sldMasterMk cId="1747979782" sldId="2147483665"/>
-            <pc:sldLayoutMk cId="1710461186" sldId="2147483706"/>
-          </pc:sldLayoutMkLst>
-          <pc:spChg chg="del">
-            <ac:chgData name="Rafaela Boletti Duraes Souto" userId="78f52f2a-2d51-4833-a638-c8c75f30638a" providerId="ADAL" clId="{7B60E563-4518-4CCE-974E-BC91E59A0147}" dt="2025-04-29T21:03:43.199" v="3" actId="478"/>
-            <ac:spMkLst>
-              <pc:docMk/>
-              <pc:sldMasterMk cId="1747979782" sldId="2147483665"/>
-              <pc:sldLayoutMk cId="1710461186" sldId="2147483706"/>
-              <ac:spMk id="10" creationId="{A3E46545-5E91-4C76-87DB-86D3C5ED1CF2}"/>
-            </ac:spMkLst>
-          </pc:spChg>
-          <pc:spChg chg="add del">
-            <ac:chgData name="Rafaela Boletti Duraes Souto" userId="78f52f2a-2d51-4833-a638-c8c75f30638a" providerId="ADAL" clId="{7B60E563-4518-4CCE-974E-BC91E59A0147}" dt="2025-04-29T21:03:46.456" v="5" actId="478"/>
-            <ac:spMkLst>
-              <pc:docMk/>
-              <pc:sldMasterMk cId="1747979782" sldId="2147483665"/>
-              <pc:sldLayoutMk cId="1710461186" sldId="2147483706"/>
-              <ac:spMk id="11" creationId="{6A358EFD-9CBE-414A-A192-43AA89E4BD9D}"/>
-            </ac:spMkLst>
-          </pc:spChg>
-          <pc:spChg chg="add del">
-            <ac:chgData name="Rafaela Boletti Duraes Souto" userId="78f52f2a-2d51-4833-a638-c8c75f30638a" providerId="ADAL" clId="{7B60E563-4518-4CCE-974E-BC91E59A0147}" dt="2025-04-29T21:04:23.749" v="10"/>
-            <ac:spMkLst>
-              <pc:docMk/>
-              <pc:sldMasterMk cId="1747979782" sldId="2147483665"/>
-              <pc:sldLayoutMk cId="1710461186" sldId="2147483706"/>
-              <ac:spMk id="12" creationId="{4BE436D4-4143-4968-90B7-24DD96BF03C4}"/>
-            </ac:spMkLst>
-          </pc:spChg>
-          <pc:spChg chg="del">
-            <ac:chgData name="Rafaela Boletti Duraes Souto" userId="78f52f2a-2d51-4833-a638-c8c75f30638a" providerId="ADAL" clId="{7B60E563-4518-4CCE-974E-BC91E59A0147}" dt="2025-04-29T21:03:43.199" v="3" actId="478"/>
-            <ac:spMkLst>
-              <pc:docMk/>
-              <pc:sldMasterMk cId="1747979782" sldId="2147483665"/>
-              <pc:sldLayoutMk cId="1710461186" sldId="2147483706"/>
-              <ac:spMk id="17" creationId="{40C1AF06-63D9-405D-94ED-2270CB6C71F7}"/>
-            </ac:spMkLst>
-          </pc:spChg>
-          <pc:spChg chg="del">
-            <ac:chgData name="Rafaela Boletti Duraes Souto" userId="78f52f2a-2d51-4833-a638-c8c75f30638a" providerId="ADAL" clId="{7B60E563-4518-4CCE-974E-BC91E59A0147}" dt="2025-04-29T21:03:43.199" v="3" actId="478"/>
-            <ac:spMkLst>
-              <pc:docMk/>
-              <pc:sldMasterMk cId="1747979782" sldId="2147483665"/>
-              <pc:sldLayoutMk cId="1710461186" sldId="2147483706"/>
-              <ac:spMk id="18" creationId="{62EECB98-DDAC-4C03-AAD6-C16BDA5AFA51}"/>
-            </ac:spMkLst>
-          </pc:spChg>
-          <pc:spChg chg="del">
-            <ac:chgData name="Rafaela Boletti Duraes Souto" userId="78f52f2a-2d51-4833-a638-c8c75f30638a" providerId="ADAL" clId="{7B60E563-4518-4CCE-974E-BC91E59A0147}" dt="2025-04-29T21:03:43.199" v="3" actId="478"/>
-            <ac:spMkLst>
-              <pc:docMk/>
-              <pc:sldMasterMk cId="1747979782" sldId="2147483665"/>
-              <pc:sldLayoutMk cId="1710461186" sldId="2147483706"/>
-              <ac:spMk id="19" creationId="{E0A2CFC7-7F55-4D80-A9C7-9E5CB7B01E35}"/>
-            </ac:spMkLst>
-          </pc:spChg>
-        </pc:sldLayoutChg>
-        <pc:sldLayoutChg chg="modSp">
-          <pc:chgData name="Rafaela Boletti Duraes Souto" userId="78f52f2a-2d51-4833-a638-c8c75f30638a" providerId="ADAL" clId="{7B60E563-4518-4CCE-974E-BC91E59A0147}" dt="2025-04-29T21:32:31.018" v="36" actId="20577"/>
-          <pc:sldLayoutMkLst>
-            <pc:docMk/>
-            <pc:sldMasterMk cId="1747979782" sldId="2147483665"/>
-            <pc:sldLayoutMk cId="146151045" sldId="2147483709"/>
-          </pc:sldLayoutMkLst>
-          <pc:spChg chg="mod">
-            <ac:chgData name="Rafaela Boletti Duraes Souto" userId="78f52f2a-2d51-4833-a638-c8c75f30638a" providerId="ADAL" clId="{7B60E563-4518-4CCE-974E-BC91E59A0147}" dt="2025-04-29T21:32:31.018" v="36" actId="20577"/>
-            <ac:spMkLst>
-              <pc:docMk/>
-              <pc:sldMasterMk cId="1747979782" sldId="2147483665"/>
-              <pc:sldLayoutMk cId="146151045" sldId="2147483709"/>
-              <ac:spMk id="19" creationId="{ADA911F7-F870-4379-9B09-DFDDF9DDD2F1}"/>
-            </ac:spMkLst>
-          </pc:spChg>
-        </pc:sldLayoutChg>
-        <pc:sldLayoutChg chg="addSp delSp">
-          <pc:chgData name="Rafaela Boletti Duraes Souto" userId="78f52f2a-2d51-4833-a638-c8c75f30638a" providerId="ADAL" clId="{7B60E563-4518-4CCE-974E-BC91E59A0147}" dt="2025-04-29T21:05:04.664" v="13"/>
-          <pc:sldLayoutMkLst>
-            <pc:docMk/>
-            <pc:sldMasterMk cId="1747979782" sldId="2147483665"/>
-            <pc:sldLayoutMk cId="4078551699" sldId="2147483713"/>
-          </pc:sldLayoutMkLst>
-          <pc:spChg chg="del">
-            <ac:chgData name="Rafaela Boletti Duraes Souto" userId="78f52f2a-2d51-4833-a638-c8c75f30638a" providerId="ADAL" clId="{7B60E563-4518-4CCE-974E-BC91E59A0147}" dt="2025-04-29T21:05:03.250" v="12" actId="478"/>
-            <ac:spMkLst>
-              <pc:docMk/>
-              <pc:sldMasterMk cId="1747979782" sldId="2147483665"/>
-              <pc:sldLayoutMk cId="4078551699" sldId="2147483713"/>
-              <ac:spMk id="11" creationId="{C3E1107A-F65D-4446-B549-C15BC6141F64}"/>
-            </ac:spMkLst>
-          </pc:spChg>
-          <pc:spChg chg="del">
-            <ac:chgData name="Rafaela Boletti Duraes Souto" userId="78f52f2a-2d51-4833-a638-c8c75f30638a" providerId="ADAL" clId="{7B60E563-4518-4CCE-974E-BC91E59A0147}" dt="2025-04-29T21:05:03.250" v="12" actId="478"/>
-            <ac:spMkLst>
-              <pc:docMk/>
-              <pc:sldMasterMk cId="1747979782" sldId="2147483665"/>
-              <pc:sldLayoutMk cId="4078551699" sldId="2147483713"/>
-              <ac:spMk id="12" creationId="{049CF1A5-5C9D-4007-B940-D8710EFCB117}"/>
-            </ac:spMkLst>
-          </pc:spChg>
-          <pc:spChg chg="add">
-            <ac:chgData name="Rafaela Boletti Duraes Souto" userId="78f52f2a-2d51-4833-a638-c8c75f30638a" providerId="ADAL" clId="{7B60E563-4518-4CCE-974E-BC91E59A0147}" dt="2025-04-29T21:05:04.664" v="13"/>
-            <ac:spMkLst>
-              <pc:docMk/>
-              <pc:sldMasterMk cId="1747979782" sldId="2147483665"/>
-              <pc:sldLayoutMk cId="4078551699" sldId="2147483713"/>
-              <ac:spMk id="13" creationId="{3882337C-E7B6-4407-8566-CA16D112E823}"/>
-            </ac:spMkLst>
-          </pc:spChg>
-        </pc:sldLayoutChg>
-        <pc:sldLayoutChg chg="modSp">
-          <pc:chgData name="Rafaela Boletti Duraes Souto" userId="78f52f2a-2d51-4833-a638-c8c75f30638a" providerId="ADAL" clId="{7B60E563-4518-4CCE-974E-BC91E59A0147}" dt="2025-04-29T21:07:14.867" v="16" actId="6549"/>
-          <pc:sldLayoutMkLst>
-            <pc:docMk/>
-            <pc:sldMasterMk cId="1747979782" sldId="2147483665"/>
-            <pc:sldLayoutMk cId="624351883" sldId="2147483717"/>
-          </pc:sldLayoutMkLst>
-          <pc:spChg chg="mod">
-            <ac:chgData name="Rafaela Boletti Duraes Souto" userId="78f52f2a-2d51-4833-a638-c8c75f30638a" providerId="ADAL" clId="{7B60E563-4518-4CCE-974E-BC91E59A0147}" dt="2025-04-29T21:07:14.867" v="16" actId="6549"/>
-            <ac:spMkLst>
-              <pc:docMk/>
-              <pc:sldMasterMk cId="1747979782" sldId="2147483665"/>
-              <pc:sldLayoutMk cId="624351883" sldId="2147483717"/>
-              <ac:spMk id="19" creationId="{ADA911F7-F870-4379-9B09-DFDDF9DDD2F1}"/>
-            </ac:spMkLst>
-          </pc:spChg>
-        </pc:sldLayoutChg>
-        <pc:sldLayoutChg chg="addSp delSp modSp">
-          <pc:chgData name="Rafaela Boletti Duraes Souto" userId="78f52f2a-2d51-4833-a638-c8c75f30638a" providerId="ADAL" clId="{7B60E563-4518-4CCE-974E-BC91E59A0147}" dt="2025-04-29T21:36:03.166" v="52" actId="20577"/>
-          <pc:sldLayoutMkLst>
-            <pc:docMk/>
-            <pc:sldMasterMk cId="1747979782" sldId="2147483665"/>
-            <pc:sldLayoutMk cId="2049671676" sldId="2147483722"/>
-          </pc:sldLayoutMkLst>
-          <pc:spChg chg="del">
-            <ac:chgData name="Rafaela Boletti Duraes Souto" userId="78f52f2a-2d51-4833-a638-c8c75f30638a" providerId="ADAL" clId="{7B60E563-4518-4CCE-974E-BC91E59A0147}" dt="2025-04-29T21:08:07.675" v="19" actId="478"/>
-            <ac:spMkLst>
-              <pc:docMk/>
-              <pc:sldMasterMk cId="1747979782" sldId="2147483665"/>
-              <pc:sldLayoutMk cId="2049671676" sldId="2147483722"/>
-              <ac:spMk id="3" creationId="{5DB21FAF-8D04-492A-8B51-65E48BD9D09F}"/>
-            </ac:spMkLst>
-          </pc:spChg>
-          <pc:spChg chg="add">
-            <ac:chgData name="Rafaela Boletti Duraes Souto" userId="78f52f2a-2d51-4833-a638-c8c75f30638a" providerId="ADAL" clId="{7B60E563-4518-4CCE-974E-BC91E59A0147}" dt="2025-04-29T21:35:54.947" v="38"/>
-            <ac:spMkLst>
-              <pc:docMk/>
-              <pc:sldMasterMk cId="1747979782" sldId="2147483665"/>
-              <pc:sldLayoutMk cId="2049671676" sldId="2147483722"/>
-              <ac:spMk id="7" creationId="{501599B7-B559-460E-8E98-42C40007A311}"/>
-            </ac:spMkLst>
-          </pc:spChg>
-          <pc:spChg chg="add del">
-            <ac:chgData name="Rafaela Boletti Duraes Souto" userId="78f52f2a-2d51-4833-a638-c8c75f30638a" providerId="ADAL" clId="{7B60E563-4518-4CCE-974E-BC91E59A0147}" dt="2025-04-29T21:35:54.460" v="37" actId="478"/>
-            <ac:spMkLst>
-              <pc:docMk/>
-              <pc:sldMasterMk cId="1747979782" sldId="2147483665"/>
-              <pc:sldLayoutMk cId="2049671676" sldId="2147483722"/>
-              <ac:spMk id="8" creationId="{04364BF6-4DD9-45C1-9529-E3D06719ED49}"/>
-            </ac:spMkLst>
-          </pc:spChg>
-          <pc:spChg chg="add mod">
-            <ac:chgData name="Rafaela Boletti Duraes Souto" userId="78f52f2a-2d51-4833-a638-c8c75f30638a" providerId="ADAL" clId="{7B60E563-4518-4CCE-974E-BC91E59A0147}" dt="2025-04-29T21:36:03.166" v="52" actId="20577"/>
-            <ac:spMkLst>
-              <pc:docMk/>
-              <pc:sldMasterMk cId="1747979782" sldId="2147483665"/>
-              <pc:sldLayoutMk cId="2049671676" sldId="2147483722"/>
-              <ac:spMk id="9" creationId="{840FC257-47AF-4C6D-A7A2-B2395DDAD82F}"/>
-            </ac:spMkLst>
-          </pc:spChg>
-          <pc:spChg chg="del">
-            <ac:chgData name="Rafaela Boletti Duraes Souto" userId="78f52f2a-2d51-4833-a638-c8c75f30638a" providerId="ADAL" clId="{7B60E563-4518-4CCE-974E-BC91E59A0147}" dt="2025-04-29T21:08:07.675" v="19" actId="478"/>
-            <ac:spMkLst>
-              <pc:docMk/>
-              <pc:sldMasterMk cId="1747979782" sldId="2147483665"/>
-              <pc:sldLayoutMk cId="2049671676" sldId="2147483722"/>
-              <ac:spMk id="13" creationId="{17037748-DFFD-4BFA-B7A4-BB654E3EA668}"/>
-            </ac:spMkLst>
-          </pc:spChg>
-        </pc:sldLayoutChg>
-      </pc:sldMasterChg>
-    </pc:docChg>
-  </pc:docChgLst>
-</pc:chgInfo>
 </file>
 
 <file path=ppt/handoutMasters/handoutMaster1.xml><?xml version="1.0" encoding="utf-8"?>
@@ -1350,7 +243,7 @@
           <a:p>
             <a:fld id="{22D2343C-BD3C-4650-924C-40706B7DFBCE}" type="datetimeFigureOut">
               <a:rPr lang="pt-BR" smtClean="0"/>
-              <a:t>08/05/2025</a:t>
+              <a:t>03/04/2026</a:t>
             </a:fld>
             <a:endParaRPr lang="pt-BR"/>
           </a:p>
@@ -2321,13 +1214,13 @@
           <p:nvPr userDrawn="1"/>
         </p:nvPicPr>
         <p:blipFill>
-          <a:blip r:embed="rId2">
+          <a:blip>
             <a:extLst>
               <a:ext uri="{28A0092B-C50C-407E-A947-70E740481C1C}">
                 <a14:useLocalDpi xmlns:a14="http://schemas.microsoft.com/office/drawing/2010/main" val="0"/>
               </a:ext>
               <a:ext uri="{96DAC541-7B7A-43D3-8B79-37D633B846F1}">
-                <asvg:svgBlip xmlns:asvg="http://schemas.microsoft.com/office/drawing/2016/SVG/main" r:embed="rId3"/>
+                <asvg:svgBlip xmlns:asvg="http://schemas.microsoft.com/office/drawing/2016/SVG/main" r:embed="rId2"/>
               </a:ext>
             </a:extLst>
           </a:blip>
@@ -3296,7 +2189,10 @@
           <a:bodyPr/>
           <a:lstStyle/>
           <a:p>
-            <a:endParaRPr lang="pt-BR" dirty="0"/>
+            <a:r>
+              <a:rPr lang="pt-BR" dirty="0"/>
+              <a:t>Bruno Mumbach</a:t>
+            </a:r>
           </a:p>
         </p:txBody>
       </p:sp>
@@ -3304,6 +2200,387 @@
     <p:extLst>
       <p:ext uri="{BB962C8B-B14F-4D97-AF65-F5344CB8AC3E}">
         <p14:creationId xmlns:p14="http://schemas.microsoft.com/office/powerpoint/2010/main" val="341837096"/>
+      </p:ext>
+    </p:extLst>
+  </p:cSld>
+  <p:clrMapOvr>
+    <a:masterClrMapping/>
+  </p:clrMapOvr>
+</p:sld>
+</file>
+
+<file path=ppt/slides/slide10.xml><?xml version="1.0" encoding="utf-8"?>
+<p:sld xmlns:a="http://schemas.openxmlformats.org/drawingml/2006/main" xmlns:r="http://schemas.openxmlformats.org/officeDocument/2006/relationships" xmlns:p="http://schemas.openxmlformats.org/presentationml/2006/main">
+  <p:cSld>
+    <p:spTree>
+      <p:nvGrpSpPr>
+        <p:cNvPr id="1" name="">
+          <a:extLst>
+            <a:ext uri="{FF2B5EF4-FFF2-40B4-BE49-F238E27FC236}">
+              <a16:creationId xmlns:a16="http://schemas.microsoft.com/office/drawing/2014/main" id="{B36F7298-D832-0A1B-AA9C-7819E8FED1BE}"/>
+            </a:ext>
+          </a:extLst>
+        </p:cNvPr>
+        <p:cNvGrpSpPr/>
+        <p:nvPr/>
+      </p:nvGrpSpPr>
+      <p:grpSpPr>
+        <a:xfrm>
+          <a:off x="0" y="0"/>
+          <a:ext cx="0" cy="0"/>
+          <a:chOff x="0" y="0"/>
+          <a:chExt cx="0" cy="0"/>
+        </a:xfrm>
+      </p:grpSpPr>
+      <p:sp>
+        <p:nvSpPr>
+          <p:cNvPr id="2" name="Espaço Reservado para Texto 1">
+            <a:extLst>
+              <a:ext uri="{FF2B5EF4-FFF2-40B4-BE49-F238E27FC236}">
+                <a16:creationId xmlns:a16="http://schemas.microsoft.com/office/drawing/2014/main" id="{E10AF734-F607-2DB1-2E96-71DAC1FC8C0F}"/>
+              </a:ext>
+            </a:extLst>
+          </p:cNvPr>
+          <p:cNvSpPr>
+            <a:spLocks noGrp="1"/>
+          </p:cNvSpPr>
+          <p:nvPr>
+            <p:ph type="body" sz="quarter" idx="10"/>
+          </p:nvPr>
+        </p:nvSpPr>
+        <p:spPr/>
+        <p:txBody>
+          <a:bodyPr/>
+          <a:lstStyle/>
+          <a:p>
+            <a:pPr marL="285750" indent="-285750">
+              <a:buFont typeface="Arial" panose="020B0604020202020204" pitchFamily="34" charset="0"/>
+              <a:buChar char="•"/>
+            </a:pPr>
+            <a:endParaRPr lang="pt-BR" sz="2000" dirty="0"/>
+          </a:p>
+          <a:p>
+            <a:pPr marL="285750" indent="-285750">
+              <a:buFont typeface="Arial" panose="020B0604020202020204" pitchFamily="34" charset="0"/>
+              <a:buChar char="•"/>
+            </a:pPr>
+            <a:endParaRPr lang="pt-BR" sz="2000" dirty="0"/>
+          </a:p>
+          <a:p>
+            <a:pPr marL="285750" indent="-285750">
+              <a:buFont typeface="Arial" panose="020B0604020202020204" pitchFamily="34" charset="0"/>
+              <a:buChar char="•"/>
+            </a:pPr>
+            <a:endParaRPr lang="pt-BR" sz="2000" dirty="0"/>
+          </a:p>
+          <a:p>
+            <a:pPr marL="285750" indent="-285750">
+              <a:buFont typeface="Arial" panose="020B0604020202020204" pitchFamily="34" charset="0"/>
+              <a:buChar char="•"/>
+            </a:pPr>
+            <a:r>
+              <a:rPr lang="pt-BR" sz="2000" dirty="0"/>
+              <a:t>Há uma tendência clara de crescimento da área plantada, </a:t>
+            </a:r>
+          </a:p>
+          <a:p>
+            <a:r>
+              <a:rPr lang="pt-BR" sz="2000" dirty="0"/>
+              <a:t>principalmente para soja.</a:t>
+            </a:r>
+          </a:p>
+          <a:p>
+            <a:pPr marL="285750" indent="-285750">
+              <a:buFont typeface="Arial" panose="020B0604020202020204" pitchFamily="34" charset="0"/>
+              <a:buChar char="•"/>
+            </a:pPr>
+            <a:r>
+              <a:rPr lang="pt-BR" sz="2000" dirty="0"/>
+              <a:t>Esse crescimento indica:</a:t>
+            </a:r>
+          </a:p>
+          <a:p>
+            <a:pPr lvl="1"/>
+            <a:r>
+              <a:rPr lang="pt-BR" sz="2000" dirty="0"/>
+              <a:t>expansão agrícola</a:t>
+            </a:r>
+          </a:p>
+          <a:p>
+            <a:pPr lvl="1"/>
+            <a:r>
+              <a:rPr lang="pt-BR" sz="2000" dirty="0"/>
+              <a:t>aumento da demanda</a:t>
+            </a:r>
+          </a:p>
+          <a:p>
+            <a:pPr lvl="1"/>
+            <a:r>
+              <a:rPr lang="pt-BR" sz="2000" dirty="0"/>
+              <a:t>maior investimento no setor</a:t>
+            </a:r>
+          </a:p>
+          <a:p>
+            <a:pPr lvl="1"/>
+            <a:r>
+              <a:rPr lang="pt-BR" sz="2000" dirty="0"/>
+              <a:t>maior rentabilidade da cultura</a:t>
+            </a:r>
+          </a:p>
+          <a:p>
+            <a:pPr marL="285750" indent="-285750">
+              <a:buFont typeface="Arial" panose="020B0604020202020204" pitchFamily="34" charset="0"/>
+              <a:buChar char="•"/>
+            </a:pPr>
+            <a:r>
+              <a:rPr lang="pt-BR" sz="2000" dirty="0"/>
+              <a:t>Outras culturas permanecem relativamente estáveis.</a:t>
+            </a:r>
+          </a:p>
+        </p:txBody>
+      </p:sp>
+      <p:pic>
+        <p:nvPicPr>
+          <p:cNvPr id="4" name="Imagem 3">
+            <a:extLst>
+              <a:ext uri="{FF2B5EF4-FFF2-40B4-BE49-F238E27FC236}">
+                <a16:creationId xmlns:a16="http://schemas.microsoft.com/office/drawing/2014/main" id="{55622239-500A-DF96-683B-73A7440F10F6}"/>
+              </a:ext>
+            </a:extLst>
+          </p:cNvPr>
+          <p:cNvPicPr>
+            <a:picLocks noChangeAspect="1"/>
+          </p:cNvPicPr>
+          <p:nvPr/>
+        </p:nvPicPr>
+        <p:blipFill>
+          <a:blip r:embed="rId2"/>
+          <a:stretch>
+            <a:fillRect/>
+          </a:stretch>
+        </p:blipFill>
+        <p:spPr>
+          <a:xfrm>
+            <a:off x="7494708" y="1416050"/>
+            <a:ext cx="7946327" cy="6242050"/>
+          </a:xfrm>
+          <a:prstGeom prst="rect">
+            <a:avLst/>
+          </a:prstGeom>
+        </p:spPr>
+      </p:pic>
+    </p:spTree>
+    <p:extLst>
+      <p:ext uri="{BB962C8B-B14F-4D97-AF65-F5344CB8AC3E}">
+        <p14:creationId xmlns:p14="http://schemas.microsoft.com/office/powerpoint/2010/main" val="2325865092"/>
+      </p:ext>
+    </p:extLst>
+  </p:cSld>
+  <p:clrMapOvr>
+    <a:masterClrMapping/>
+  </p:clrMapOvr>
+</p:sld>
+</file>
+
+<file path=ppt/slides/slide11.xml><?xml version="1.0" encoding="utf-8"?>
+<p:sld xmlns:a="http://schemas.openxmlformats.org/drawingml/2006/main" xmlns:r="http://schemas.openxmlformats.org/officeDocument/2006/relationships" xmlns:p="http://schemas.openxmlformats.org/presentationml/2006/main">
+  <p:cSld>
+    <p:spTree>
+      <p:nvGrpSpPr>
+        <p:cNvPr id="1" name=""/>
+        <p:cNvGrpSpPr/>
+        <p:nvPr/>
+      </p:nvGrpSpPr>
+      <p:grpSpPr>
+        <a:xfrm>
+          <a:off x="0" y="0"/>
+          <a:ext cx="0" cy="0"/>
+          <a:chOff x="0" y="0"/>
+          <a:chExt cx="0" cy="0"/>
+        </a:xfrm>
+      </p:grpSpPr>
+      <p:sp>
+        <p:nvSpPr>
+          <p:cNvPr id="2" name="Espaço Reservado para Texto 1">
+            <a:extLst>
+              <a:ext uri="{FF2B5EF4-FFF2-40B4-BE49-F238E27FC236}">
+                <a16:creationId xmlns:a16="http://schemas.microsoft.com/office/drawing/2014/main" id="{FE308C6E-6FCE-BE01-8FA7-7AE3523364A5}"/>
+              </a:ext>
+            </a:extLst>
+          </p:cNvPr>
+          <p:cNvSpPr>
+            <a:spLocks noGrp="1"/>
+          </p:cNvSpPr>
+          <p:nvPr>
+            <p:ph type="body" sz="quarter" idx="10"/>
+          </p:nvPr>
+        </p:nvSpPr>
+        <p:spPr/>
+        <p:txBody>
+          <a:bodyPr/>
+          <a:lstStyle/>
+          <a:p>
+            <a:r>
+              <a:rPr lang="pt-BR" dirty="0"/>
+              <a:t>	</a:t>
+            </a:r>
+          </a:p>
+          <a:p>
+            <a:endParaRPr lang="pt-BR" dirty="0"/>
+          </a:p>
+          <a:p>
+            <a:endParaRPr lang="pt-BR" dirty="0"/>
+          </a:p>
+          <a:p>
+            <a:endParaRPr lang="pt-BR" dirty="0"/>
+          </a:p>
+          <a:p>
+            <a:endParaRPr lang="pt-BR" dirty="0"/>
+          </a:p>
+          <a:p>
+            <a:endParaRPr lang="pt-BR" dirty="0"/>
+          </a:p>
+          <a:p>
+            <a:endParaRPr lang="pt-BR" dirty="0"/>
+          </a:p>
+          <a:p>
+            <a:endParaRPr lang="pt-BR" dirty="0"/>
+          </a:p>
+          <a:p>
+            <a:endParaRPr lang="pt-BR" dirty="0"/>
+          </a:p>
+          <a:p>
+            <a:endParaRPr lang="pt-BR" dirty="0"/>
+          </a:p>
+          <a:p>
+            <a:endParaRPr lang="pt-BR" dirty="0"/>
+          </a:p>
+          <a:p>
+            <a:endParaRPr lang="pt-BR" dirty="0"/>
+          </a:p>
+          <a:p>
+            <a:endParaRPr lang="pt-BR" dirty="0"/>
+          </a:p>
+          <a:p>
+            <a:r>
+              <a:rPr lang="pt-BR" dirty="0"/>
+              <a:t>O valor da produção apresenta alta volatilidade, com picos expressivos em 2021 ocasionados pela alta no preço da soja.</a:t>
+            </a:r>
+          </a:p>
+          <a:p>
+            <a:r>
+              <a:rPr lang="pt-BR" dirty="0"/>
+              <a:t>A soja é o principal driver do valor econômico.</a:t>
+            </a:r>
+          </a:p>
+          <a:p>
+            <a:r>
+              <a:rPr lang="pt-BR" dirty="0"/>
+              <a:t>Milho e trigo possuem participação menor, mas relevante.</a:t>
+            </a:r>
+          </a:p>
+          <a:p>
+            <a:r>
+              <a:rPr lang="pt-BR" dirty="0"/>
+              <a:t>O modelo produtivo é altamente dependente da soja, aumentando risco econômico.</a:t>
+            </a:r>
+          </a:p>
+        </p:txBody>
+      </p:sp>
+      <p:pic>
+        <p:nvPicPr>
+          <p:cNvPr id="4" name="Imagem 3">
+            <a:extLst>
+              <a:ext uri="{FF2B5EF4-FFF2-40B4-BE49-F238E27FC236}">
+                <a16:creationId xmlns:a16="http://schemas.microsoft.com/office/drawing/2014/main" id="{7FF5B378-1B61-B94F-BE6F-E3A18723A385}"/>
+              </a:ext>
+            </a:extLst>
+          </p:cNvPr>
+          <p:cNvPicPr>
+            <a:picLocks noChangeAspect="1"/>
+          </p:cNvPicPr>
+          <p:nvPr/>
+        </p:nvPicPr>
+        <p:blipFill>
+          <a:blip r:embed="rId2"/>
+          <a:stretch>
+            <a:fillRect/>
+          </a:stretch>
+        </p:blipFill>
+        <p:spPr>
+          <a:xfrm>
+            <a:off x="7226300" y="1416051"/>
+            <a:ext cx="8243886" cy="5201376"/>
+          </a:xfrm>
+          <a:prstGeom prst="rect">
+            <a:avLst/>
+          </a:prstGeom>
+        </p:spPr>
+      </p:pic>
+      <p:pic>
+        <p:nvPicPr>
+          <p:cNvPr id="8" name="Imagem 7">
+            <a:extLst>
+              <a:ext uri="{FF2B5EF4-FFF2-40B4-BE49-F238E27FC236}">
+                <a16:creationId xmlns:a16="http://schemas.microsoft.com/office/drawing/2014/main" id="{3D26E4C1-DAE2-8ADE-994D-FB18A9A0CFAB}"/>
+              </a:ext>
+            </a:extLst>
+          </p:cNvPr>
+          <p:cNvPicPr>
+            <a:picLocks noChangeAspect="1"/>
+          </p:cNvPicPr>
+          <p:nvPr/>
+        </p:nvPicPr>
+        <p:blipFill>
+          <a:blip r:embed="rId3"/>
+          <a:stretch>
+            <a:fillRect/>
+          </a:stretch>
+        </p:blipFill>
+        <p:spPr>
+          <a:xfrm>
+            <a:off x="931864" y="1416050"/>
+            <a:ext cx="6294436" cy="5201376"/>
+          </a:xfrm>
+          <a:prstGeom prst="rect">
+            <a:avLst/>
+          </a:prstGeom>
+        </p:spPr>
+      </p:pic>
+    </p:spTree>
+    <p:extLst>
+      <p:ext uri="{BB962C8B-B14F-4D97-AF65-F5344CB8AC3E}">
+        <p14:creationId xmlns:p14="http://schemas.microsoft.com/office/powerpoint/2010/main" val="728146975"/>
+      </p:ext>
+    </p:extLst>
+  </p:cSld>
+  <p:clrMapOvr>
+    <a:masterClrMapping/>
+  </p:clrMapOvr>
+</p:sld>
+</file>
+
+<file path=ppt/slides/slide12.xml><?xml version="1.0" encoding="utf-8"?>
+<p:sld xmlns:a="http://schemas.openxmlformats.org/drawingml/2006/main" xmlns:r="http://schemas.openxmlformats.org/officeDocument/2006/relationships" xmlns:p="http://schemas.openxmlformats.org/presentationml/2006/main">
+  <p:cSld>
+    <p:spTree>
+      <p:nvGrpSpPr>
+        <p:cNvPr id="1" name=""/>
+        <p:cNvGrpSpPr/>
+        <p:nvPr/>
+      </p:nvGrpSpPr>
+      <p:grpSpPr>
+        <a:xfrm>
+          <a:off x="0" y="0"/>
+          <a:ext cx="0" cy="0"/>
+          <a:chOff x="0" y="0"/>
+          <a:chExt cx="0" cy="0"/>
+        </a:xfrm>
+      </p:grpSpPr>
+    </p:spTree>
+    <p:extLst>
+      <p:ext uri="{BB962C8B-B14F-4D97-AF65-F5344CB8AC3E}">
+        <p14:creationId xmlns:p14="http://schemas.microsoft.com/office/powerpoint/2010/main" val="580378000"/>
       </p:ext>
     </p:extLst>
   </p:cSld>
@@ -3330,10 +2607,69 @@
           <a:chExt cx="0" cy="0"/>
         </a:xfrm>
       </p:grpSpPr>
+      <p:sp>
+        <p:nvSpPr>
+          <p:cNvPr id="2" name="Espaço Reservado para Texto 1">
+            <a:extLst>
+              <a:ext uri="{FF2B5EF4-FFF2-40B4-BE49-F238E27FC236}">
+                <a16:creationId xmlns:a16="http://schemas.microsoft.com/office/drawing/2014/main" id="{9F231F41-DE0E-41DF-BB7D-7FA8E186AB3E}"/>
+              </a:ext>
+            </a:extLst>
+          </p:cNvPr>
+          <p:cNvSpPr>
+            <a:spLocks noGrp="1"/>
+          </p:cNvSpPr>
+          <p:nvPr>
+            <p:ph type="body" sz="quarter" idx="10"/>
+          </p:nvPr>
+        </p:nvSpPr>
+        <p:spPr/>
+        <p:txBody>
+          <a:bodyPr/>
+          <a:lstStyle/>
+          <a:p>
+            <a:r>
+              <a:rPr lang="pt-BR" dirty="0"/>
+              <a:t>				</a:t>
+            </a:r>
+          </a:p>
+          <a:p>
+            <a:endParaRPr lang="pt-BR" dirty="0"/>
+          </a:p>
+          <a:p>
+            <a:endParaRPr lang="pt-BR" sz="2400" b="1" dirty="0"/>
+          </a:p>
+          <a:p>
+            <a:r>
+              <a:rPr lang="pt-BR" sz="2400" b="1" dirty="0"/>
+              <a:t>			Análise Produtiva Agrícola no Noroeste do RS</a:t>
+            </a:r>
+          </a:p>
+          <a:p>
+            <a:endParaRPr lang="pt-BR" dirty="0"/>
+          </a:p>
+          <a:p>
+            <a:endParaRPr lang="pt-BR" dirty="0"/>
+          </a:p>
+          <a:p>
+            <a:endParaRPr lang="pt-BR" dirty="0"/>
+          </a:p>
+          <a:p>
+            <a:r>
+              <a:rPr lang="pt-BR" dirty="0"/>
+              <a:t>		</a:t>
+            </a:r>
+            <a:r>
+              <a:rPr lang="pt-BR" sz="2000" dirty="0"/>
+              <a:t>O setor agrícola possui alta relevância econômica, porém enfrenta desafios relacionados à eficiência produtiva, 			variabilidade climática e tomada de decisão baseada em dados.</a:t>
+            </a:r>
+          </a:p>
+        </p:txBody>
+      </p:sp>
     </p:spTree>
     <p:extLst>
       <p:ext uri="{BB962C8B-B14F-4D97-AF65-F5344CB8AC3E}">
-        <p14:creationId xmlns:p14="http://schemas.microsoft.com/office/powerpoint/2010/main" val="1508243658"/>
+        <p14:creationId xmlns:p14="http://schemas.microsoft.com/office/powerpoint/2010/main" val="4066044570"/>
       </p:ext>
     </p:extLst>
   </p:cSld>
@@ -3344,6 +2680,410 @@
 </file>
 
 <file path=ppt/slides/slide3.xml><?xml version="1.0" encoding="utf-8"?>
+<p:sld xmlns:a="http://schemas.openxmlformats.org/drawingml/2006/main" xmlns:r="http://schemas.openxmlformats.org/officeDocument/2006/relationships" xmlns:p="http://schemas.openxmlformats.org/presentationml/2006/main">
+  <p:cSld>
+    <p:spTree>
+      <p:nvGrpSpPr>
+        <p:cNvPr id="1" name="">
+          <a:extLst>
+            <a:ext uri="{FF2B5EF4-FFF2-40B4-BE49-F238E27FC236}">
+              <a16:creationId xmlns:a16="http://schemas.microsoft.com/office/drawing/2014/main" id="{D74BD62F-FD6C-48D8-9BD0-2827F1B4D0D6}"/>
+            </a:ext>
+          </a:extLst>
+        </p:cNvPr>
+        <p:cNvGrpSpPr/>
+        <p:nvPr/>
+      </p:nvGrpSpPr>
+      <p:grpSpPr>
+        <a:xfrm>
+          <a:off x="0" y="0"/>
+          <a:ext cx="0" cy="0"/>
+          <a:chOff x="0" y="0"/>
+          <a:chExt cx="0" cy="0"/>
+        </a:xfrm>
+      </p:grpSpPr>
+      <p:sp>
+        <p:nvSpPr>
+          <p:cNvPr id="2" name="Espaço Reservado para Texto 1">
+            <a:extLst>
+              <a:ext uri="{FF2B5EF4-FFF2-40B4-BE49-F238E27FC236}">
+                <a16:creationId xmlns:a16="http://schemas.microsoft.com/office/drawing/2014/main" id="{37B7BC18-E2BA-ABE4-408D-011172329A28}"/>
+              </a:ext>
+            </a:extLst>
+          </p:cNvPr>
+          <p:cNvSpPr>
+            <a:spLocks noGrp="1"/>
+          </p:cNvSpPr>
+          <p:nvPr>
+            <p:ph type="body" sz="quarter" idx="10"/>
+          </p:nvPr>
+        </p:nvSpPr>
+        <p:spPr/>
+        <p:txBody>
+          <a:bodyPr/>
+          <a:lstStyle/>
+          <a:p>
+            <a:endParaRPr lang="pt-BR" sz="2400" b="1" dirty="0"/>
+          </a:p>
+          <a:p>
+            <a:endParaRPr lang="pt-BR" sz="2400" b="1" dirty="0"/>
+          </a:p>
+          <a:p>
+            <a:endParaRPr lang="pt-BR" sz="2400" b="1" dirty="0"/>
+          </a:p>
+          <a:p>
+            <a:endParaRPr lang="pt-BR" sz="2400" b="1" dirty="0"/>
+          </a:p>
+          <a:p>
+            <a:r>
+              <a:rPr lang="pt-BR" sz="2400" b="1" dirty="0"/>
+              <a:t>Problema de Negócio</a:t>
+            </a:r>
+          </a:p>
+          <a:p>
+            <a:endParaRPr lang="pt-BR" sz="2400" b="1" dirty="0"/>
+          </a:p>
+          <a:p>
+            <a:r>
+              <a:rPr lang="pt-BR" sz="2400" dirty="0"/>
+              <a:t>Como identificar padrões produtivos e fatores que influenciam a eficiência agrícola na região, utilizando dados históricos e ferramentas analíticas?</a:t>
+            </a:r>
+            <a:endParaRPr lang="pt-BR" sz="2400" b="1" dirty="0"/>
+          </a:p>
+        </p:txBody>
+      </p:sp>
+    </p:spTree>
+    <p:extLst>
+      <p:ext uri="{BB962C8B-B14F-4D97-AF65-F5344CB8AC3E}">
+        <p14:creationId xmlns:p14="http://schemas.microsoft.com/office/powerpoint/2010/main" val="766839659"/>
+      </p:ext>
+    </p:extLst>
+  </p:cSld>
+  <p:clrMapOvr>
+    <a:masterClrMapping/>
+  </p:clrMapOvr>
+</p:sld>
+</file>
+
+<file path=ppt/slides/slide4.xml><?xml version="1.0" encoding="utf-8"?>
+<p:sld xmlns:a="http://schemas.openxmlformats.org/drawingml/2006/main" xmlns:r="http://schemas.openxmlformats.org/officeDocument/2006/relationships" xmlns:p="http://schemas.openxmlformats.org/presentationml/2006/main">
+  <p:cSld>
+    <p:spTree>
+      <p:nvGrpSpPr>
+        <p:cNvPr id="1" name="">
+          <a:extLst>
+            <a:ext uri="{FF2B5EF4-FFF2-40B4-BE49-F238E27FC236}">
+              <a16:creationId xmlns:a16="http://schemas.microsoft.com/office/drawing/2014/main" id="{376F1A70-B64F-7289-5717-29C5C1479758}"/>
+            </a:ext>
+          </a:extLst>
+        </p:cNvPr>
+        <p:cNvGrpSpPr/>
+        <p:nvPr/>
+      </p:nvGrpSpPr>
+      <p:grpSpPr>
+        <a:xfrm>
+          <a:off x="0" y="0"/>
+          <a:ext cx="0" cy="0"/>
+          <a:chOff x="0" y="0"/>
+          <a:chExt cx="0" cy="0"/>
+        </a:xfrm>
+      </p:grpSpPr>
+      <p:sp>
+        <p:nvSpPr>
+          <p:cNvPr id="2" name="Espaço Reservado para Texto 1">
+            <a:extLst>
+              <a:ext uri="{FF2B5EF4-FFF2-40B4-BE49-F238E27FC236}">
+                <a16:creationId xmlns:a16="http://schemas.microsoft.com/office/drawing/2014/main" id="{190FA340-B7EA-C7DF-A898-B8F1E022CF96}"/>
+              </a:ext>
+            </a:extLst>
+          </p:cNvPr>
+          <p:cNvSpPr>
+            <a:spLocks noGrp="1"/>
+          </p:cNvSpPr>
+          <p:nvPr>
+            <p:ph type="body" sz="quarter" idx="10"/>
+          </p:nvPr>
+        </p:nvSpPr>
+        <p:spPr/>
+        <p:txBody>
+          <a:bodyPr/>
+          <a:lstStyle/>
+          <a:p>
+            <a:r>
+              <a:rPr lang="pt-BR" dirty="0"/>
+              <a:t>		</a:t>
+            </a:r>
+          </a:p>
+          <a:p>
+            <a:endParaRPr lang="pt-BR" dirty="0"/>
+          </a:p>
+          <a:p>
+            <a:endParaRPr lang="pt-BR" dirty="0"/>
+          </a:p>
+          <a:p>
+            <a:endParaRPr lang="pt-BR" dirty="0"/>
+          </a:p>
+          <a:p>
+            <a:endParaRPr lang="pt-BR" dirty="0"/>
+          </a:p>
+          <a:p>
+            <a:endParaRPr lang="pt-BR" dirty="0"/>
+          </a:p>
+          <a:p>
+            <a:endParaRPr lang="pt-BR" dirty="0"/>
+          </a:p>
+          <a:p>
+            <a:endParaRPr lang="pt-BR" dirty="0"/>
+          </a:p>
+          <a:p>
+            <a:r>
+              <a:rPr lang="pt-BR" dirty="0"/>
+              <a:t>	</a:t>
+            </a:r>
+            <a:r>
+              <a:rPr lang="pt-BR" sz="2000" dirty="0"/>
+              <a:t>Os cards no topo da tela indicam os valores correspondentes aos filtros aplicados por cultura.</a:t>
+            </a:r>
+          </a:p>
+          <a:p>
+            <a:endParaRPr lang="pt-BR" sz="2000" dirty="0"/>
+          </a:p>
+          <a:p>
+            <a:endParaRPr lang="pt-BR" sz="2000" dirty="0"/>
+          </a:p>
+          <a:p>
+            <a:r>
+              <a:rPr lang="pt-BR" sz="2000" dirty="0"/>
+              <a:t>	Caso seja selecionado o ano de 2024 e a variável de Área plantada, os cards irão exibir os valores referente a essas informações</a:t>
+            </a:r>
+          </a:p>
+        </p:txBody>
+      </p:sp>
+      <p:pic>
+        <p:nvPicPr>
+          <p:cNvPr id="8" name="Imagem 7">
+            <a:extLst>
+              <a:ext uri="{FF2B5EF4-FFF2-40B4-BE49-F238E27FC236}">
+                <a16:creationId xmlns:a16="http://schemas.microsoft.com/office/drawing/2014/main" id="{C1C48808-04F1-6396-2643-87460B5C640A}"/>
+              </a:ext>
+            </a:extLst>
+          </p:cNvPr>
+          <p:cNvPicPr>
+            <a:picLocks noChangeAspect="1"/>
+          </p:cNvPicPr>
+          <p:nvPr/>
+        </p:nvPicPr>
+        <p:blipFill>
+          <a:blip r:embed="rId2"/>
+          <a:stretch>
+            <a:fillRect/>
+          </a:stretch>
+        </p:blipFill>
+        <p:spPr>
+          <a:xfrm>
+            <a:off x="1861253" y="1681025"/>
+            <a:ext cx="12679544" cy="1971950"/>
+          </a:xfrm>
+          <a:prstGeom prst="rect">
+            <a:avLst/>
+          </a:prstGeom>
+        </p:spPr>
+      </p:pic>
+    </p:spTree>
+    <p:extLst>
+      <p:ext uri="{BB962C8B-B14F-4D97-AF65-F5344CB8AC3E}">
+        <p14:creationId xmlns:p14="http://schemas.microsoft.com/office/powerpoint/2010/main" val="3174410245"/>
+      </p:ext>
+    </p:extLst>
+  </p:cSld>
+  <p:clrMapOvr>
+    <a:masterClrMapping/>
+  </p:clrMapOvr>
+</p:sld>
+</file>
+
+<file path=ppt/slides/slide5.xml><?xml version="1.0" encoding="utf-8"?>
+<p:sld xmlns:a="http://schemas.openxmlformats.org/drawingml/2006/main" xmlns:r="http://schemas.openxmlformats.org/officeDocument/2006/relationships" xmlns:p="http://schemas.openxmlformats.org/presentationml/2006/main">
+  <p:cSld>
+    <p:spTree>
+      <p:nvGrpSpPr>
+        <p:cNvPr id="1" name="">
+          <a:extLst>
+            <a:ext uri="{FF2B5EF4-FFF2-40B4-BE49-F238E27FC236}">
+              <a16:creationId xmlns:a16="http://schemas.microsoft.com/office/drawing/2014/main" id="{01BBB20D-7AA0-3D55-F0C9-26EEE3E8229F}"/>
+            </a:ext>
+          </a:extLst>
+        </p:cNvPr>
+        <p:cNvGrpSpPr/>
+        <p:nvPr/>
+      </p:nvGrpSpPr>
+      <p:grpSpPr>
+        <a:xfrm>
+          <a:off x="0" y="0"/>
+          <a:ext cx="0" cy="0"/>
+          <a:chOff x="0" y="0"/>
+          <a:chExt cx="0" cy="0"/>
+        </a:xfrm>
+      </p:grpSpPr>
+      <p:sp>
+        <p:nvSpPr>
+          <p:cNvPr id="2" name="Espaço Reservado para Texto 1">
+            <a:extLst>
+              <a:ext uri="{FF2B5EF4-FFF2-40B4-BE49-F238E27FC236}">
+                <a16:creationId xmlns:a16="http://schemas.microsoft.com/office/drawing/2014/main" id="{DDC2B5EE-E94B-678B-A39A-8BCC95D8D767}"/>
+              </a:ext>
+            </a:extLst>
+          </p:cNvPr>
+          <p:cNvSpPr>
+            <a:spLocks noGrp="1"/>
+          </p:cNvSpPr>
+          <p:nvPr>
+            <p:ph type="body" sz="quarter" idx="10"/>
+          </p:nvPr>
+        </p:nvSpPr>
+        <p:spPr/>
+        <p:txBody>
+          <a:bodyPr/>
+          <a:lstStyle/>
+          <a:p>
+            <a:pPr marL="285750" indent="-285750">
+              <a:buFont typeface="Arial" panose="020B0604020202020204" pitchFamily="34" charset="0"/>
+              <a:buChar char="•"/>
+            </a:pPr>
+            <a:endParaRPr lang="pt-BR" dirty="0"/>
+          </a:p>
+          <a:p>
+            <a:pPr marL="285750" indent="-285750">
+              <a:buFont typeface="Arial" panose="020B0604020202020204" pitchFamily="34" charset="0"/>
+              <a:buChar char="•"/>
+            </a:pPr>
+            <a:endParaRPr lang="pt-BR" dirty="0"/>
+          </a:p>
+          <a:p>
+            <a:pPr marL="285750" indent="-285750">
+              <a:buFont typeface="Arial" panose="020B0604020202020204" pitchFamily="34" charset="0"/>
+              <a:buChar char="•"/>
+            </a:pPr>
+            <a:endParaRPr lang="pt-BR" dirty="0"/>
+          </a:p>
+          <a:p>
+            <a:pPr marL="285750" indent="-285750">
+              <a:buFont typeface="Arial" panose="020B0604020202020204" pitchFamily="34" charset="0"/>
+              <a:buChar char="•"/>
+            </a:pPr>
+            <a:r>
+              <a:rPr lang="pt-BR" dirty="0"/>
+              <a:t>A produtividade apresenta variações significativas ao</a:t>
+            </a:r>
+          </a:p>
+          <a:p>
+            <a:r>
+              <a:rPr lang="pt-BR" dirty="0"/>
+              <a:t> longo dos anos, indicando forte influência de fatores externos.</a:t>
+            </a:r>
+          </a:p>
+          <a:p>
+            <a:pPr marL="285750" indent="-285750">
+              <a:buFont typeface="Arial" panose="020B0604020202020204" pitchFamily="34" charset="0"/>
+              <a:buChar char="•"/>
+            </a:pPr>
+            <a:r>
+              <a:rPr lang="pt-BR" dirty="0"/>
+              <a:t>O milho apresenta os maiores níveis de produtividade, </a:t>
+            </a:r>
+          </a:p>
+          <a:p>
+            <a:r>
+              <a:rPr lang="pt-BR" dirty="0"/>
+              <a:t>seguido por soja e trigo.</a:t>
+            </a:r>
+          </a:p>
+          <a:p>
+            <a:pPr marL="285750" indent="-285750">
+              <a:buFont typeface="Arial" panose="020B0604020202020204" pitchFamily="34" charset="0"/>
+              <a:buChar char="•"/>
+            </a:pPr>
+            <a:r>
+              <a:rPr lang="pt-BR" dirty="0"/>
+              <a:t>Observa-se uma queda acentuada em determinados </a:t>
+            </a:r>
+          </a:p>
+          <a:p>
+            <a:r>
+              <a:rPr lang="pt-BR" dirty="0"/>
+              <a:t>períodos (</a:t>
+            </a:r>
+            <a:r>
+              <a:rPr lang="pt-BR" dirty="0" err="1"/>
+              <a:t>ex</a:t>
+            </a:r>
+            <a:r>
+              <a:rPr lang="pt-BR" dirty="0"/>
+              <a:t>: 2022), relacionada a condições climáticas adversas.</a:t>
+            </a:r>
+          </a:p>
+          <a:p>
+            <a:pPr marL="285750" indent="-285750">
+              <a:buFont typeface="Arial" panose="020B0604020202020204" pitchFamily="34" charset="0"/>
+              <a:buChar char="•"/>
+            </a:pPr>
+            <a:r>
+              <a:rPr lang="pt-BR" dirty="0"/>
+              <a:t>Há uma tendência de recuperação recente, indicando </a:t>
+            </a:r>
+          </a:p>
+          <a:p>
+            <a:r>
+              <a:rPr lang="pt-BR" dirty="0"/>
+              <a:t>Adaptação do setor.</a:t>
+            </a:r>
+          </a:p>
+        </p:txBody>
+      </p:sp>
+      <p:pic>
+        <p:nvPicPr>
+          <p:cNvPr id="4" name="Imagem 3">
+            <a:extLst>
+              <a:ext uri="{FF2B5EF4-FFF2-40B4-BE49-F238E27FC236}">
+                <a16:creationId xmlns:a16="http://schemas.microsoft.com/office/drawing/2014/main" id="{B1938424-5823-B02C-F91F-D7791FA0EBDA}"/>
+              </a:ext>
+            </a:extLst>
+          </p:cNvPr>
+          <p:cNvPicPr>
+            <a:picLocks noChangeAspect="1"/>
+          </p:cNvPicPr>
+          <p:nvPr/>
+        </p:nvPicPr>
+        <p:blipFill>
+          <a:blip r:embed="rId2"/>
+          <a:stretch>
+            <a:fillRect/>
+          </a:stretch>
+        </p:blipFill>
+        <p:spPr>
+          <a:xfrm>
+            <a:off x="7124700" y="1533525"/>
+            <a:ext cx="8259761" cy="6534150"/>
+          </a:xfrm>
+          <a:prstGeom prst="rect">
+            <a:avLst/>
+          </a:prstGeom>
+        </p:spPr>
+      </p:pic>
+    </p:spTree>
+    <p:extLst>
+      <p:ext uri="{BB962C8B-B14F-4D97-AF65-F5344CB8AC3E}">
+        <p14:creationId xmlns:p14="http://schemas.microsoft.com/office/powerpoint/2010/main" val="48901172"/>
+      </p:ext>
+    </p:extLst>
+  </p:cSld>
+  <p:clrMapOvr>
+    <a:masterClrMapping/>
+  </p:clrMapOvr>
+</p:sld>
+</file>
+
+<file path=ppt/slides/slide6.xml><?xml version="1.0" encoding="utf-8"?>
 <p:sld xmlns:a="http://schemas.openxmlformats.org/drawingml/2006/main" xmlns:r="http://schemas.openxmlformats.org/officeDocument/2006/relationships" xmlns:p="http://schemas.openxmlformats.org/presentationml/2006/main">
   <p:cSld>
     <p:spTree>
@@ -3365,7 +3105,7 @@
           <p:cNvPr id="2" name="Espaço Reservado para Texto 1">
             <a:extLst>
               <a:ext uri="{FF2B5EF4-FFF2-40B4-BE49-F238E27FC236}">
-                <a16:creationId xmlns:a16="http://schemas.microsoft.com/office/drawing/2014/main" id="{9F231F41-DE0E-41DF-BB7D-7FA8E186AB3E}"/>
+                <a16:creationId xmlns:a16="http://schemas.microsoft.com/office/drawing/2014/main" id="{A6CD381A-3056-B210-70DD-D73F87323419}"/>
               </a:ext>
             </a:extLst>
           </p:cNvPr>
@@ -3383,12 +3123,78 @@
           <a:p>
             <a:endParaRPr lang="pt-BR" dirty="0"/>
           </a:p>
+          <a:p>
+            <a:endParaRPr lang="pt-BR" dirty="0"/>
+          </a:p>
+          <a:p>
+            <a:endParaRPr lang="pt-BR" dirty="0"/>
+          </a:p>
+          <a:p>
+            <a:endParaRPr lang="pt-BR" dirty="0"/>
+          </a:p>
+          <a:p>
+            <a:endParaRPr lang="pt-BR" dirty="0"/>
+          </a:p>
+          <a:p>
+            <a:r>
+              <a:rPr lang="pt-BR" sz="2000" dirty="0"/>
+              <a:t>O milho apresenta a maior produtividade média porém menor valor agregado.</a:t>
+            </a:r>
+          </a:p>
+          <a:p>
+            <a:r>
+              <a:rPr lang="pt-BR" sz="2000" dirty="0"/>
+              <a:t>Soja e trigo apresentam desempenho intermediário.</a:t>
+            </a:r>
+          </a:p>
+          <a:p>
+            <a:r>
+              <a:rPr lang="pt-BR" sz="2000" dirty="0"/>
+              <a:t>O fumo possui menor produtividade, mas tem maior valor agregado.</a:t>
+            </a:r>
+          </a:p>
+          <a:p>
+            <a:r>
+              <a:rPr lang="pt-BR" sz="2000" dirty="0"/>
+              <a:t>Diferenças indicam eficiência distinta entre culturas.</a:t>
+            </a:r>
+          </a:p>
         </p:txBody>
       </p:sp>
+      <p:pic>
+        <p:nvPicPr>
+          <p:cNvPr id="4" name="Imagem 3">
+            <a:extLst>
+              <a:ext uri="{FF2B5EF4-FFF2-40B4-BE49-F238E27FC236}">
+                <a16:creationId xmlns:a16="http://schemas.microsoft.com/office/drawing/2014/main" id="{AA83FD64-AB1B-D72A-B7A8-F9C34822A60B}"/>
+              </a:ext>
+            </a:extLst>
+          </p:cNvPr>
+          <p:cNvPicPr>
+            <a:picLocks noChangeAspect="1"/>
+          </p:cNvPicPr>
+          <p:nvPr/>
+        </p:nvPicPr>
+        <p:blipFill>
+          <a:blip r:embed="rId2"/>
+          <a:stretch>
+            <a:fillRect/>
+          </a:stretch>
+        </p:blipFill>
+        <p:spPr>
+          <a:xfrm>
+            <a:off x="9119275" y="1416050"/>
+            <a:ext cx="6354086" cy="6064250"/>
+          </a:xfrm>
+          <a:prstGeom prst="rect">
+            <a:avLst/>
+          </a:prstGeom>
+        </p:spPr>
+      </p:pic>
     </p:spTree>
     <p:extLst>
       <p:ext uri="{BB962C8B-B14F-4D97-AF65-F5344CB8AC3E}">
-        <p14:creationId xmlns:p14="http://schemas.microsoft.com/office/powerpoint/2010/main" val="4066044570"/>
+        <p14:creationId xmlns:p14="http://schemas.microsoft.com/office/powerpoint/2010/main" val="912042630"/>
       </p:ext>
     </p:extLst>
   </p:cSld>
@@ -3398,7 +3204,351 @@
 </p:sld>
 </file>
 
-<file path=ppt/slides/slide4.xml><?xml version="1.0" encoding="utf-8"?>
+<file path=ppt/slides/slide7.xml><?xml version="1.0" encoding="utf-8"?>
+<p:sld xmlns:a="http://schemas.openxmlformats.org/drawingml/2006/main" xmlns:r="http://schemas.openxmlformats.org/officeDocument/2006/relationships" xmlns:p="http://schemas.openxmlformats.org/presentationml/2006/main">
+  <p:cSld>
+    <p:spTree>
+      <p:nvGrpSpPr>
+        <p:cNvPr id="1" name="">
+          <a:extLst>
+            <a:ext uri="{FF2B5EF4-FFF2-40B4-BE49-F238E27FC236}">
+              <a16:creationId xmlns:a16="http://schemas.microsoft.com/office/drawing/2014/main" id="{E79E0FFC-54EA-DE84-48CA-010BC4FAA137}"/>
+            </a:ext>
+          </a:extLst>
+        </p:cNvPr>
+        <p:cNvGrpSpPr/>
+        <p:nvPr/>
+      </p:nvGrpSpPr>
+      <p:grpSpPr>
+        <a:xfrm>
+          <a:off x="0" y="0"/>
+          <a:ext cx="0" cy="0"/>
+          <a:chOff x="0" y="0"/>
+          <a:chExt cx="0" cy="0"/>
+        </a:xfrm>
+      </p:grpSpPr>
+      <p:sp>
+        <p:nvSpPr>
+          <p:cNvPr id="2" name="Espaço Reservado para Texto 1">
+            <a:extLst>
+              <a:ext uri="{FF2B5EF4-FFF2-40B4-BE49-F238E27FC236}">
+                <a16:creationId xmlns:a16="http://schemas.microsoft.com/office/drawing/2014/main" id="{447EA283-FDFB-15CD-D851-56E6690B8756}"/>
+              </a:ext>
+            </a:extLst>
+          </p:cNvPr>
+          <p:cNvSpPr>
+            <a:spLocks noGrp="1"/>
+          </p:cNvSpPr>
+          <p:nvPr>
+            <p:ph type="body" sz="quarter" idx="10"/>
+          </p:nvPr>
+        </p:nvSpPr>
+        <p:spPr/>
+        <p:txBody>
+          <a:bodyPr/>
+          <a:lstStyle/>
+          <a:p>
+            <a:endParaRPr lang="pt-BR" dirty="0"/>
+          </a:p>
+          <a:p>
+            <a:endParaRPr lang="pt-BR" dirty="0"/>
+          </a:p>
+          <a:p>
+            <a:endParaRPr lang="pt-BR" dirty="0"/>
+          </a:p>
+          <a:p>
+            <a:endParaRPr lang="pt-BR" dirty="0"/>
+          </a:p>
+          <a:p>
+            <a:endParaRPr lang="pt-BR" dirty="0"/>
+          </a:p>
+          <a:p>
+            <a:endParaRPr lang="pt-BR" dirty="0"/>
+          </a:p>
+          <a:p>
+            <a:endParaRPr lang="pt-BR" dirty="0"/>
+          </a:p>
+          <a:p>
+            <a:endParaRPr lang="pt-BR" dirty="0"/>
+          </a:p>
+          <a:p>
+            <a:endParaRPr lang="pt-BR" dirty="0"/>
+          </a:p>
+          <a:p>
+            <a:endParaRPr lang="pt-BR" dirty="0"/>
+          </a:p>
+          <a:p>
+            <a:pPr marL="285750" indent="-285750">
+              <a:buFont typeface="Arial" panose="020B0604020202020204" pitchFamily="34" charset="0"/>
+              <a:buChar char="•"/>
+            </a:pPr>
+            <a:r>
+              <a:rPr lang="pt-BR" sz="2000" dirty="0"/>
+              <a:t>A produção agrícola está geograficamente concentrada em alguns municípios-chave.</a:t>
+            </a:r>
+          </a:p>
+          <a:p>
+            <a:pPr marL="285750" indent="-285750">
+              <a:buFont typeface="Arial" panose="020B0604020202020204" pitchFamily="34" charset="0"/>
+              <a:buChar char="•"/>
+            </a:pPr>
+            <a:r>
+              <a:rPr lang="pt-BR" sz="2000" dirty="0"/>
+              <a:t>Regiões com maior área plantada tendem a ser também os principais polos produtivos.</a:t>
+            </a:r>
+          </a:p>
+          <a:p>
+            <a:pPr marL="285750" indent="-285750">
+              <a:buFont typeface="Arial" panose="020B0604020202020204" pitchFamily="34" charset="0"/>
+              <a:buChar char="•"/>
+            </a:pPr>
+            <a:r>
+              <a:rPr lang="pt-BR" sz="2000" dirty="0"/>
+              <a:t>Existe uma desigualdade regional, com poucos municípios concentrando grande parte da produção.</a:t>
+            </a:r>
+          </a:p>
+        </p:txBody>
+      </p:sp>
+      <p:pic>
+        <p:nvPicPr>
+          <p:cNvPr id="4" name="Imagem 3">
+            <a:extLst>
+              <a:ext uri="{FF2B5EF4-FFF2-40B4-BE49-F238E27FC236}">
+                <a16:creationId xmlns:a16="http://schemas.microsoft.com/office/drawing/2014/main" id="{1F035C51-BB9C-0204-69EB-4785D78593B7}"/>
+              </a:ext>
+            </a:extLst>
+          </p:cNvPr>
+          <p:cNvPicPr>
+            <a:picLocks noChangeAspect="1"/>
+          </p:cNvPicPr>
+          <p:nvPr/>
+        </p:nvPicPr>
+        <p:blipFill>
+          <a:blip r:embed="rId2"/>
+          <a:stretch>
+            <a:fillRect/>
+          </a:stretch>
+        </p:blipFill>
+        <p:spPr>
+          <a:xfrm>
+            <a:off x="6136716" y="1416050"/>
+            <a:ext cx="9336645" cy="4051507"/>
+          </a:xfrm>
+          <a:prstGeom prst="rect">
+            <a:avLst/>
+          </a:prstGeom>
+        </p:spPr>
+      </p:pic>
+    </p:spTree>
+    <p:extLst>
+      <p:ext uri="{BB962C8B-B14F-4D97-AF65-F5344CB8AC3E}">
+        <p14:creationId xmlns:p14="http://schemas.microsoft.com/office/powerpoint/2010/main" val="1670657427"/>
+      </p:ext>
+    </p:extLst>
+  </p:cSld>
+  <p:clrMapOvr>
+    <a:masterClrMapping/>
+  </p:clrMapOvr>
+</p:sld>
+</file>
+
+<file path=ppt/slides/slide8.xml><?xml version="1.0" encoding="utf-8"?>
+<p:sld xmlns:a="http://schemas.openxmlformats.org/drawingml/2006/main" xmlns:r="http://schemas.openxmlformats.org/officeDocument/2006/relationships" xmlns:p="http://schemas.openxmlformats.org/presentationml/2006/main">
+  <p:cSld>
+    <p:spTree>
+      <p:nvGrpSpPr>
+        <p:cNvPr id="1" name="">
+          <a:extLst>
+            <a:ext uri="{FF2B5EF4-FFF2-40B4-BE49-F238E27FC236}">
+              <a16:creationId xmlns:a16="http://schemas.microsoft.com/office/drawing/2014/main" id="{D3C84EBA-16AF-9349-76B6-AC7A54FC0DAC}"/>
+            </a:ext>
+          </a:extLst>
+        </p:cNvPr>
+        <p:cNvGrpSpPr/>
+        <p:nvPr/>
+      </p:nvGrpSpPr>
+      <p:grpSpPr>
+        <a:xfrm>
+          <a:off x="0" y="0"/>
+          <a:ext cx="0" cy="0"/>
+          <a:chOff x="0" y="0"/>
+          <a:chExt cx="0" cy="0"/>
+        </a:xfrm>
+      </p:grpSpPr>
+      <p:sp>
+        <p:nvSpPr>
+          <p:cNvPr id="2" name="Espaço Reservado para Texto 1">
+            <a:extLst>
+              <a:ext uri="{FF2B5EF4-FFF2-40B4-BE49-F238E27FC236}">
+                <a16:creationId xmlns:a16="http://schemas.microsoft.com/office/drawing/2014/main" id="{B98355B9-13F2-7E6E-CB75-0EA160E41050}"/>
+              </a:ext>
+            </a:extLst>
+          </p:cNvPr>
+          <p:cNvSpPr>
+            <a:spLocks noGrp="1"/>
+          </p:cNvSpPr>
+          <p:nvPr>
+            <p:ph type="body" sz="quarter" idx="10"/>
+          </p:nvPr>
+        </p:nvSpPr>
+        <p:spPr/>
+        <p:txBody>
+          <a:bodyPr/>
+          <a:lstStyle/>
+          <a:p>
+            <a:pPr marL="285750" indent="-285750">
+              <a:buFont typeface="Arial" panose="020B0604020202020204" pitchFamily="34" charset="0"/>
+              <a:buChar char="•"/>
+            </a:pPr>
+            <a:endParaRPr lang="pt-BR" sz="2000" dirty="0"/>
+          </a:p>
+          <a:p>
+            <a:pPr marL="285750" indent="-285750">
+              <a:buFont typeface="Arial" panose="020B0604020202020204" pitchFamily="34" charset="0"/>
+              <a:buChar char="•"/>
+            </a:pPr>
+            <a:endParaRPr lang="pt-BR" sz="2000" dirty="0"/>
+          </a:p>
+          <a:p>
+            <a:pPr marL="285750" indent="-285750">
+              <a:buFont typeface="Arial" panose="020B0604020202020204" pitchFamily="34" charset="0"/>
+              <a:buChar char="•"/>
+            </a:pPr>
+            <a:endParaRPr lang="pt-BR" sz="2000" dirty="0"/>
+          </a:p>
+          <a:p>
+            <a:pPr marL="285750" indent="-285750">
+              <a:buFont typeface="Arial" panose="020B0604020202020204" pitchFamily="34" charset="0"/>
+              <a:buChar char="•"/>
+            </a:pPr>
+            <a:endParaRPr lang="pt-BR" sz="2000" dirty="0"/>
+          </a:p>
+          <a:p>
+            <a:pPr marL="285750" indent="-285750">
+              <a:buFont typeface="Arial" panose="020B0604020202020204" pitchFamily="34" charset="0"/>
+              <a:buChar char="•"/>
+            </a:pPr>
+            <a:r>
+              <a:rPr lang="pt-BR" sz="2000" dirty="0"/>
+              <a:t>A produção está altamente concentrada em poucos municípios.</a:t>
+            </a:r>
+          </a:p>
+          <a:p>
+            <a:pPr marL="285750" indent="-285750">
+              <a:buFont typeface="Arial" panose="020B0604020202020204" pitchFamily="34" charset="0"/>
+              <a:buChar char="•"/>
+            </a:pPr>
+            <a:r>
+              <a:rPr lang="pt-BR" sz="2000" dirty="0"/>
+              <a:t>Municípios como Tupanciretã, Palmeira das Missões e Cruz Alta lideram o ranking.</a:t>
+            </a:r>
+          </a:p>
+          <a:p>
+            <a:pPr marL="285750" indent="-285750">
+              <a:buFont typeface="Arial" panose="020B0604020202020204" pitchFamily="34" charset="0"/>
+              <a:buChar char="•"/>
+            </a:pPr>
+            <a:r>
+              <a:rPr lang="pt-BR" sz="2000" dirty="0"/>
+              <a:t>Essa concentração pode indicar:</a:t>
+            </a:r>
+          </a:p>
+          <a:p>
+            <a:pPr marL="925830" lvl="1" indent="-285750">
+              <a:buFont typeface="Arial" panose="020B0604020202020204" pitchFamily="34" charset="0"/>
+              <a:buChar char="•"/>
+            </a:pPr>
+            <a:r>
+              <a:rPr lang="pt-BR" sz="2000" dirty="0"/>
+              <a:t>maior uso de tecnologia</a:t>
+            </a:r>
+          </a:p>
+          <a:p>
+            <a:pPr marL="925830" lvl="1" indent="-285750">
+              <a:buFont typeface="Arial" panose="020B0604020202020204" pitchFamily="34" charset="0"/>
+              <a:buChar char="•"/>
+            </a:pPr>
+            <a:r>
+              <a:rPr lang="pt-BR" sz="2000" dirty="0"/>
+              <a:t>melhor infraestrutura</a:t>
+            </a:r>
+          </a:p>
+          <a:p>
+            <a:pPr marL="925830" lvl="1" indent="-285750">
+              <a:buFont typeface="Arial" panose="020B0604020202020204" pitchFamily="34" charset="0"/>
+              <a:buChar char="•"/>
+            </a:pPr>
+            <a:r>
+              <a:rPr lang="pt-BR" sz="2000" dirty="0"/>
+              <a:t>maior acesso a crédito</a:t>
+            </a:r>
+          </a:p>
+          <a:p>
+            <a:pPr marL="925830" lvl="1" indent="-285750">
+              <a:buFont typeface="Arial" panose="020B0604020202020204" pitchFamily="34" charset="0"/>
+              <a:buChar char="•"/>
+            </a:pPr>
+            <a:r>
+              <a:rPr lang="pt-BR" sz="2000" dirty="0"/>
+              <a:t>Terras mais produtivas</a:t>
+            </a:r>
+          </a:p>
+          <a:p>
+            <a:pPr marL="925830" lvl="1" indent="-285750">
+              <a:buFont typeface="Arial" panose="020B0604020202020204" pitchFamily="34" charset="0"/>
+              <a:buChar char="•"/>
+            </a:pPr>
+            <a:r>
+              <a:rPr lang="pt-BR" sz="2000" dirty="0"/>
+              <a:t>Maior extensão de terra por município</a:t>
+            </a:r>
+          </a:p>
+        </p:txBody>
+      </p:sp>
+      <p:pic>
+        <p:nvPicPr>
+          <p:cNvPr id="7" name="Imagem 6">
+            <a:extLst>
+              <a:ext uri="{FF2B5EF4-FFF2-40B4-BE49-F238E27FC236}">
+                <a16:creationId xmlns:a16="http://schemas.microsoft.com/office/drawing/2014/main" id="{41BBDE0E-9D30-D284-3F26-A9E84B4C7C08}"/>
+              </a:ext>
+            </a:extLst>
+          </p:cNvPr>
+          <p:cNvPicPr>
+            <a:picLocks noChangeAspect="1"/>
+          </p:cNvPicPr>
+          <p:nvPr/>
+        </p:nvPicPr>
+        <p:blipFill>
+          <a:blip r:embed="rId2"/>
+          <a:stretch>
+            <a:fillRect/>
+          </a:stretch>
+        </p:blipFill>
+        <p:spPr>
+          <a:xfrm>
+            <a:off x="11544300" y="1207611"/>
+            <a:ext cx="3929061" cy="7803702"/>
+          </a:xfrm>
+          <a:prstGeom prst="rect">
+            <a:avLst/>
+          </a:prstGeom>
+        </p:spPr>
+      </p:pic>
+    </p:spTree>
+    <p:extLst>
+      <p:ext uri="{BB962C8B-B14F-4D97-AF65-F5344CB8AC3E}">
+        <p14:creationId xmlns:p14="http://schemas.microsoft.com/office/powerpoint/2010/main" val="3154866513"/>
+      </p:ext>
+    </p:extLst>
+  </p:cSld>
+  <p:clrMapOvr>
+    <a:masterClrMapping/>
+  </p:clrMapOvr>
+</p:sld>
+</file>
+
+<file path=ppt/slides/slide9.xml><?xml version="1.0" encoding="utf-8"?>
 <p:sld xmlns:a="http://schemas.openxmlformats.org/drawingml/2006/main" xmlns:r="http://schemas.openxmlformats.org/officeDocument/2006/relationships" xmlns:p="http://schemas.openxmlformats.org/presentationml/2006/main">
   <p:cSld>
     <p:spTree>
@@ -3415,10 +3565,140 @@
           <a:chExt cx="0" cy="0"/>
         </a:xfrm>
       </p:grpSpPr>
+      <p:sp>
+        <p:nvSpPr>
+          <p:cNvPr id="2" name="Espaço Reservado para Texto 1">
+            <a:extLst>
+              <a:ext uri="{FF2B5EF4-FFF2-40B4-BE49-F238E27FC236}">
+                <a16:creationId xmlns:a16="http://schemas.microsoft.com/office/drawing/2014/main" id="{E3C6B949-22C6-B482-3A8A-9D213FAFB594}"/>
+              </a:ext>
+            </a:extLst>
+          </p:cNvPr>
+          <p:cNvSpPr>
+            <a:spLocks noGrp="1"/>
+          </p:cNvSpPr>
+          <p:nvPr>
+            <p:ph type="body" sz="quarter" idx="10"/>
+          </p:nvPr>
+        </p:nvSpPr>
+        <p:spPr/>
+        <p:txBody>
+          <a:bodyPr/>
+          <a:lstStyle/>
+          <a:p>
+            <a:pPr marL="285750" indent="-285750">
+              <a:buFont typeface="Arial" panose="020B0604020202020204" pitchFamily="34" charset="0"/>
+              <a:buChar char="•"/>
+            </a:pPr>
+            <a:endParaRPr lang="pt-BR" sz="2000" dirty="0"/>
+          </a:p>
+          <a:p>
+            <a:pPr marL="285750" indent="-285750">
+              <a:buFont typeface="Arial" panose="020B0604020202020204" pitchFamily="34" charset="0"/>
+              <a:buChar char="•"/>
+            </a:pPr>
+            <a:endParaRPr lang="pt-BR" sz="2000" dirty="0"/>
+          </a:p>
+          <a:p>
+            <a:pPr marL="285750" indent="-285750">
+              <a:buFont typeface="Arial" panose="020B0604020202020204" pitchFamily="34" charset="0"/>
+              <a:buChar char="•"/>
+            </a:pPr>
+            <a:endParaRPr lang="pt-BR" sz="2000" dirty="0"/>
+          </a:p>
+          <a:p>
+            <a:pPr marL="285750" indent="-285750">
+              <a:buFont typeface="Arial" panose="020B0604020202020204" pitchFamily="34" charset="0"/>
+              <a:buChar char="•"/>
+            </a:pPr>
+            <a:r>
+              <a:rPr lang="pt-BR" sz="2000" dirty="0"/>
+              <a:t>Diferentes municípios apresentam especialização produtiva.</a:t>
+            </a:r>
+          </a:p>
+          <a:p>
+            <a:pPr marL="285750" indent="-285750">
+              <a:buFont typeface="Arial" panose="020B0604020202020204" pitchFamily="34" charset="0"/>
+              <a:buChar char="•"/>
+            </a:pPr>
+            <a:r>
+              <a:rPr lang="pt-BR" sz="2000" dirty="0"/>
+              <a:t>Alguns são dominados por soja, enquanto outros possuem maior </a:t>
+            </a:r>
+          </a:p>
+          <a:p>
+            <a:r>
+              <a:rPr lang="pt-BR" sz="2000" dirty="0"/>
+              <a:t>      equilíbrio entre culturas.</a:t>
+            </a:r>
+          </a:p>
+          <a:p>
+            <a:pPr marL="285750" indent="-285750">
+              <a:buFont typeface="Arial" panose="020B0604020202020204" pitchFamily="34" charset="0"/>
+              <a:buChar char="•"/>
+            </a:pPr>
+            <a:r>
+              <a:rPr lang="pt-BR" sz="2000" dirty="0"/>
+              <a:t>Essa especialização pode ser explicada por:</a:t>
+            </a:r>
+          </a:p>
+          <a:p>
+            <a:pPr lvl="1"/>
+            <a:r>
+              <a:rPr lang="pt-BR" sz="2000" dirty="0"/>
+              <a:t>condições climáticas</a:t>
+            </a:r>
+          </a:p>
+          <a:p>
+            <a:pPr lvl="1"/>
+            <a:r>
+              <a:rPr lang="pt-BR" sz="2000" dirty="0"/>
+              <a:t>tipo de solo</a:t>
+            </a:r>
+          </a:p>
+          <a:p>
+            <a:pPr lvl="1"/>
+            <a:r>
+              <a:rPr lang="pt-BR" sz="2000" dirty="0"/>
+              <a:t>estratégias econômicas</a:t>
+            </a:r>
+          </a:p>
+        </p:txBody>
+      </p:sp>
+      <p:pic>
+        <p:nvPicPr>
+          <p:cNvPr id="4" name="Imagem 3">
+            <a:extLst>
+              <a:ext uri="{FF2B5EF4-FFF2-40B4-BE49-F238E27FC236}">
+                <a16:creationId xmlns:a16="http://schemas.microsoft.com/office/drawing/2014/main" id="{BEF2D802-CED9-D22F-8B91-93043FAA7C8F}"/>
+              </a:ext>
+            </a:extLst>
+          </p:cNvPr>
+          <p:cNvPicPr>
+            <a:picLocks noChangeAspect="1"/>
+          </p:cNvPicPr>
+          <p:nvPr/>
+        </p:nvPicPr>
+        <p:blipFill>
+          <a:blip r:embed="rId2"/>
+          <a:stretch>
+            <a:fillRect/>
+          </a:stretch>
+        </p:blipFill>
+        <p:spPr>
+          <a:xfrm>
+            <a:off x="8153365" y="1416050"/>
+            <a:ext cx="7319996" cy="6267450"/>
+          </a:xfrm>
+          <a:prstGeom prst="rect">
+            <a:avLst/>
+          </a:prstGeom>
+        </p:spPr>
+      </p:pic>
     </p:spTree>
     <p:extLst>
       <p:ext uri="{BB962C8B-B14F-4D97-AF65-F5344CB8AC3E}">
-        <p14:creationId xmlns:p14="http://schemas.microsoft.com/office/powerpoint/2010/main" val="580378000"/>
+        <p14:creationId xmlns:p14="http://schemas.microsoft.com/office/powerpoint/2010/main" val="1710389393"/>
       </p:ext>
     </p:extLst>
   </p:cSld>
@@ -4052,23 +4332,6 @@
 </file>
 
 <file path=customXml/item1.xml><?xml version="1.0" encoding="utf-8"?>
-<p:properties xmlns:p="http://schemas.microsoft.com/office/2006/metadata/properties" xmlns:xsi="http://www.w3.org/2001/XMLSchema-instance" xmlns:pc="http://schemas.microsoft.com/office/infopath/2007/PartnerControls">
-  <documentManagement>
-    <_activity xmlns="6439f31e-650a-4110-90ce-dedea4761958" xsi:nil="true"/>
-  </documentManagement>
-</p:properties>
-</file>
-
-<file path=customXml/item2.xml><?xml version="1.0" encoding="utf-8"?>
-<?mso-contentType ?>
-<FormTemplates xmlns="http://schemas.microsoft.com/sharepoint/v3/contenttype/forms">
-  <Display>DocumentLibraryForm</Display>
-  <Edit>DocumentLibraryForm</Edit>
-  <New>DocumentLibraryForm</New>
-</FormTemplates>
-</file>
-
-<file path=customXml/item3.xml><?xml version="1.0" encoding="utf-8"?>
 <ct:contentTypeSchema xmlns:ct="http://schemas.microsoft.com/office/2006/metadata/contentType" xmlns:ma="http://schemas.microsoft.com/office/2006/metadata/properties/metaAttributes" ct:_="" ma:_="" ma:contentTypeName="Documento" ma:contentTypeID="0x010100D0B80C79D672AC42A1970465DFBE826F" ma:contentTypeVersion="15" ma:contentTypeDescription="Crie um novo documento." ma:contentTypeScope="" ma:versionID="2eefaa1e6d6c44dc16da2b9d163c9050">
   <xsd:schema xmlns:xsd="http://www.w3.org/2001/XMLSchema" xmlns:xs="http://www.w3.org/2001/XMLSchema" xmlns:p="http://schemas.microsoft.com/office/2006/metadata/properties" xmlns:ns3="6439f31e-650a-4110-90ce-dedea4761958" xmlns:ns4="0c1d693f-504f-4903-8fa4-fc4240ce4f11" targetNamespace="http://schemas.microsoft.com/office/2006/metadata/properties" ma:root="true" ma:fieldsID="0d3e9c37c1323d55a0c2b9c866021e93" ns3:_="" ns4:_="">
     <xsd:import namespace="6439f31e-650a-4110-90ce-dedea4761958"/>
@@ -4301,32 +4564,24 @@
 </ct:contentTypeSchema>
 </file>
 
-<file path=customXml/itemProps1.xml><?xml version="1.0" encoding="utf-8"?>
-<ds:datastoreItem xmlns:ds="http://schemas.openxmlformats.org/officeDocument/2006/customXml" ds:itemID="{0C5DC577-20A1-4512-B4E1-28F0CC21B7A7}">
-  <ds:schemaRefs>
-    <ds:schemaRef ds:uri="http://schemas.microsoft.com/office/2006/documentManagement/types"/>
-    <ds:schemaRef ds:uri="http://purl.org/dc/elements/1.1/"/>
-    <ds:schemaRef ds:uri="http://schemas.microsoft.com/office/2006/metadata/properties"/>
-    <ds:schemaRef ds:uri="6439f31e-650a-4110-90ce-dedea4761958"/>
-    <ds:schemaRef ds:uri="http://purl.org/dc/terms/"/>
-    <ds:schemaRef ds:uri="http://schemas.openxmlformats.org/package/2006/metadata/core-properties"/>
-    <ds:schemaRef ds:uri="http://purl.org/dc/dcmitype/"/>
-    <ds:schemaRef ds:uri="0c1d693f-504f-4903-8fa4-fc4240ce4f11"/>
-    <ds:schemaRef ds:uri="http://schemas.microsoft.com/office/infopath/2007/PartnerControls"/>
-    <ds:schemaRef ds:uri="http://www.w3.org/XML/1998/namespace"/>
-  </ds:schemaRefs>
-</ds:datastoreItem>
+<file path=customXml/item2.xml><?xml version="1.0" encoding="utf-8"?>
+<?mso-contentType ?>
+<FormTemplates xmlns="http://schemas.microsoft.com/sharepoint/v3/contenttype/forms">
+  <Display>DocumentLibraryForm</Display>
+  <Edit>DocumentLibraryForm</Edit>
+  <New>DocumentLibraryForm</New>
+</FormTemplates>
 </file>
 
-<file path=customXml/itemProps2.xml><?xml version="1.0" encoding="utf-8"?>
-<ds:datastoreItem xmlns:ds="http://schemas.openxmlformats.org/officeDocument/2006/customXml" ds:itemID="{F16D510D-55C7-43E2-BA4A-72786699A122}">
-  <ds:schemaRefs>
-    <ds:schemaRef ds:uri="http://schemas.microsoft.com/sharepoint/v3/contenttype/forms"/>
-  </ds:schemaRefs>
-</ds:datastoreItem>
+<file path=customXml/item3.xml><?xml version="1.0" encoding="utf-8"?>
+<p:properties xmlns:p="http://schemas.microsoft.com/office/2006/metadata/properties" xmlns:xsi="http://www.w3.org/2001/XMLSchema-instance" xmlns:pc="http://schemas.microsoft.com/office/infopath/2007/PartnerControls">
+  <documentManagement>
+    <_activity xmlns="6439f31e-650a-4110-90ce-dedea4761958" xsi:nil="true"/>
+  </documentManagement>
+</p:properties>
 </file>
 
-<file path=customXml/itemProps3.xml><?xml version="1.0" encoding="utf-8"?>
+<file path=customXml/itemProps1.xml><?xml version="1.0" encoding="utf-8"?>
 <ds:datastoreItem xmlns:ds="http://schemas.openxmlformats.org/officeDocument/2006/customXml" ds:itemID="{D4840938-E05E-4C2F-BC8B-C9AED83822C2}">
   <ds:schemaRefs>
     <ds:schemaRef ds:uri="http://schemas.microsoft.com/office/2006/metadata/contentType"/>
@@ -4343,4 +4598,29 @@
     <ds:schemaRef ds:uri="http://schemas.microsoft.com/internal/obd"/>
   </ds:schemaRefs>
 </ds:datastoreItem>
+</file>
+
+<file path=customXml/itemProps2.xml><?xml version="1.0" encoding="utf-8"?>
+<ds:datastoreItem xmlns:ds="http://schemas.openxmlformats.org/officeDocument/2006/customXml" ds:itemID="{F16D510D-55C7-43E2-BA4A-72786699A122}">
+  <ds:schemaRefs>
+    <ds:schemaRef ds:uri="http://schemas.microsoft.com/sharepoint/v3/contenttype/forms"/>
+  </ds:schemaRefs>
+</ds:datastoreItem>
+</file>
+
+<file path=customXml/itemProps3.xml><?xml version="1.0" encoding="utf-8"?>
+<ds:datastoreItem xmlns:ds="http://schemas.openxmlformats.org/officeDocument/2006/customXml" ds:itemID="{0C5DC577-20A1-4512-B4E1-28F0CC21B7A7}">
+  <ds:schemaRefs>
+    <ds:schemaRef ds:uri="http://schemas.microsoft.com/office/2006/documentManagement/types"/>
+    <ds:schemaRef ds:uri="http://purl.org/dc/elements/1.1/"/>
+    <ds:schemaRef ds:uri="http://schemas.microsoft.com/office/2006/metadata/properties"/>
+    <ds:schemaRef ds:uri="6439f31e-650a-4110-90ce-dedea4761958"/>
+    <ds:schemaRef ds:uri="http://purl.org/dc/terms/"/>
+    <ds:schemaRef ds:uri="http://schemas.openxmlformats.org/package/2006/metadata/core-properties"/>
+    <ds:schemaRef ds:uri="http://purl.org/dc/dcmitype/"/>
+    <ds:schemaRef ds:uri="0c1d693f-504f-4903-8fa4-fc4240ce4f11"/>
+    <ds:schemaRef ds:uri="http://schemas.microsoft.com/office/infopath/2007/PartnerControls"/>
+    <ds:schemaRef ds:uri="http://www.w3.org/XML/1998/namespace"/>
+  </ds:schemaRefs>
+</ds:datastoreItem>
 </file>